--- a/docs/funding/ARIA-Evaluator-Seed-Pitch-Deck.pptx
+++ b/docs/funding/ARIA-Evaluator-Seed-Pitch-Deck.pptx
@@ -3583,8 +3583,8 @@
         </p:nvSpPr>
         <p:spPr>
           <a:xfrm>
-            <a:off x="640080" y="1828800"/>
-            <a:ext cx="7863840" cy="822960"/>
+            <a:off x="640080" y="1645920"/>
+            <a:ext cx="7863840" cy="685800"/>
           </a:xfrm>
           <a:prstGeom prst="rect">
             <a:avLst/>
@@ -3610,8 +3610,8 @@
         </p:nvSpPr>
         <p:spPr>
           <a:xfrm>
-            <a:off x="822960" y="1828800"/>
-            <a:ext cx="1645920" cy="822960"/>
+            <a:off x="822960" y="1645920"/>
+            <a:ext cx="1645920" cy="685800"/>
           </a:xfrm>
           <a:prstGeom prst="rect">
             <a:avLst/>
@@ -3627,7 +3627,7 @@
               <a:buNone/>
             </a:pPr>
             <a:r>
-              <a:rPr lang="en-US" sz="3200" b="1" dirty="0">
+              <a:rPr lang="en-US" sz="3000" b="1" dirty="0">
                 <a:solidFill>
                   <a:srgbClr val="028090"/>
                 </a:solidFill>
@@ -3637,7 +3637,7 @@
               </a:rPr>
               <a:t>73%</a:t>
             </a:r>
-            <a:endParaRPr lang="en-US" sz="3200" dirty="0"/>
+            <a:endParaRPr lang="en-US" sz="3000" dirty="0"/>
           </a:p>
         </p:txBody>
       </p:sp>
@@ -3649,8 +3649,8 @@
         </p:nvSpPr>
         <p:spPr>
           <a:xfrm>
-            <a:off x="2560320" y="1828800"/>
-            <a:ext cx="5760720" cy="822960"/>
+            <a:off x="2560320" y="1645920"/>
+            <a:ext cx="5760720" cy="685800"/>
           </a:xfrm>
           <a:prstGeom prst="rect">
             <a:avLst/>
@@ -3666,7 +3666,7 @@
               <a:buNone/>
             </a:pPr>
             <a:r>
-              <a:rPr lang="en-US" sz="1400" dirty="0">
+              <a:rPr lang="en-US" sz="1300" dirty="0">
                 <a:solidFill>
                   <a:srgbClr val="1E293B"/>
                 </a:solidFill>
@@ -3676,7 +3676,7 @@
               </a:rPr>
               <a:t>of enterprises report AI incidents in the first 6 months of deployment</a:t>
             </a:r>
-            <a:endParaRPr lang="en-US" sz="1400" dirty="0"/>
+            <a:endParaRPr lang="en-US" sz="1300" dirty="0"/>
           </a:p>
         </p:txBody>
       </p:sp>
@@ -3688,8 +3688,8 @@
         </p:nvSpPr>
         <p:spPr>
           <a:xfrm>
-            <a:off x="640080" y="2834640"/>
-            <a:ext cx="7863840" cy="822960"/>
+            <a:off x="640080" y="2468880"/>
+            <a:ext cx="7863840" cy="685800"/>
           </a:xfrm>
           <a:prstGeom prst="rect">
             <a:avLst/>
@@ -3715,8 +3715,8 @@
         </p:nvSpPr>
         <p:spPr>
           <a:xfrm>
-            <a:off x="822960" y="2834640"/>
-            <a:ext cx="1645920" cy="822960"/>
+            <a:off x="822960" y="2468880"/>
+            <a:ext cx="1645920" cy="685800"/>
           </a:xfrm>
           <a:prstGeom prst="rect">
             <a:avLst/>
@@ -3732,7 +3732,7 @@
               <a:buNone/>
             </a:pPr>
             <a:r>
-              <a:rPr lang="en-US" sz="3200" b="1" dirty="0">
+              <a:rPr lang="en-US" sz="3000" b="1" dirty="0">
                 <a:solidFill>
                   <a:srgbClr val="028090"/>
                 </a:solidFill>
@@ -3742,7 +3742,7 @@
               </a:rPr>
               <a:t>$4.2M</a:t>
             </a:r>
-            <a:endParaRPr lang="en-US" sz="3200" dirty="0"/>
+            <a:endParaRPr lang="en-US" sz="3000" dirty="0"/>
           </a:p>
         </p:txBody>
       </p:sp>
@@ -3754,8 +3754,8 @@
         </p:nvSpPr>
         <p:spPr>
           <a:xfrm>
-            <a:off x="2560320" y="2834640"/>
-            <a:ext cx="5760720" cy="822960"/>
+            <a:off x="2560320" y="2468880"/>
+            <a:ext cx="5760720" cy="685800"/>
           </a:xfrm>
           <a:prstGeom prst="rect">
             <a:avLst/>
@@ -3771,7 +3771,7 @@
               <a:buNone/>
             </a:pPr>
             <a:r>
-              <a:rPr lang="en-US" sz="1400" dirty="0">
+              <a:rPr lang="en-US" sz="1300" dirty="0">
                 <a:solidFill>
                   <a:srgbClr val="1E293B"/>
                 </a:solidFill>
@@ -3781,7 +3781,7 @@
               </a:rPr>
               <a:t>average cost of an AI-related safety incident (Gartner 2025)</a:t>
             </a:r>
-            <a:endParaRPr lang="en-US" sz="1400" dirty="0"/>
+            <a:endParaRPr lang="en-US" sz="1300" dirty="0"/>
           </a:p>
         </p:txBody>
       </p:sp>
@@ -3793,14 +3793,14 @@
         </p:nvSpPr>
         <p:spPr>
           <a:xfrm>
-            <a:off x="640080" y="3840480"/>
-            <a:ext cx="7863840" cy="822960"/>
+            <a:off x="640080" y="3291840"/>
+            <a:ext cx="7863840" cy="685800"/>
           </a:xfrm>
           <a:prstGeom prst="rect">
             <a:avLst/>
           </a:prstGeom>
           <a:solidFill>
-            <a:srgbClr val="FEF3C7"/>
+            <a:srgbClr val="F0FAFA"/>
           </a:solidFill>
           <a:ln/>
           <a:effectLst>
@@ -3820,8 +3820,8 @@
         </p:nvSpPr>
         <p:spPr>
           <a:xfrm>
-            <a:off x="822960" y="3840480"/>
-            <a:ext cx="1645920" cy="822960"/>
+            <a:off x="822960" y="3291840"/>
+            <a:ext cx="1645920" cy="685800"/>
           </a:xfrm>
           <a:prstGeom prst="rect">
             <a:avLst/>
@@ -3837,17 +3837,17 @@
               <a:buNone/>
             </a:pPr>
             <a:r>
-              <a:rPr lang="en-US" sz="3200" b="1" dirty="0">
-                <a:solidFill>
-                  <a:srgbClr val="F59E0B"/>
+              <a:rPr lang="en-US" sz="2400" b="1" dirty="0">
+                <a:solidFill>
+                  <a:srgbClr val="028090"/>
                 </a:solidFill>
                 <a:latin typeface="Georgia" pitchFamily="34" charset="0"/>
                 <a:ea typeface="Georgia" pitchFamily="34" charset="-122"/>
                 <a:cs typeface="Georgia" pitchFamily="34" charset="-120"/>
               </a:rPr>
-              <a:t>0</a:t>
-            </a:r>
-            <a:endParaRPr lang="en-US" sz="3200" dirty="0"/>
+              <a:t>6–12 mo</a:t>
+            </a:r>
+            <a:endParaRPr lang="en-US" sz="2400" dirty="0"/>
           </a:p>
         </p:txBody>
       </p:sp>
@@ -3859,8 +3859,8 @@
         </p:nvSpPr>
         <p:spPr>
           <a:xfrm>
-            <a:off x="2560320" y="3840480"/>
-            <a:ext cx="5760720" cy="822960"/>
+            <a:off x="2560320" y="3291840"/>
+            <a:ext cx="5760720" cy="685800"/>
           </a:xfrm>
           <a:prstGeom prst="rect">
             <a:avLst/>
@@ -3876,7 +3876,7 @@
               <a:buNone/>
             </a:pPr>
             <a:r>
-              <a:rPr lang="en-US" sz="1400" dirty="0">
+              <a:rPr lang="en-US" sz="1300" dirty="0">
                 <a:solidFill>
                   <a:srgbClr val="1E293B"/>
                 </a:solidFill>
@@ -3884,21 +3884,126 @@
                 <a:ea typeface="Calibri" pitchFamily="34" charset="-122"/>
                 <a:cs typeface="Calibri" pitchFamily="34" charset="-120"/>
               </a:rPr>
+              <a:t>typical model risk validation cycle — manual, qualitative, and too slow for AI agents</a:t>
+            </a:r>
+            <a:endParaRPr lang="en-US" sz="1300" dirty="0"/>
+          </a:p>
+        </p:txBody>
+      </p:sp>
+      <p:sp>
+        <p:nvSpPr>
+          <p:cNvPr id="13" name="Shape 11"/>
+          <p:cNvSpPr/>
+          <p:nvPr/>
+        </p:nvSpPr>
+        <p:spPr>
+          <a:xfrm>
+            <a:off x="640080" y="4114800"/>
+            <a:ext cx="7863840" cy="685800"/>
+          </a:xfrm>
+          <a:prstGeom prst="rect">
+            <a:avLst/>
+          </a:prstGeom>
+          <a:solidFill>
+            <a:srgbClr val="FEF3C7"/>
+          </a:solidFill>
+          <a:ln/>
+          <a:effectLst>
+            <a:outerShdw sx="100000" sy="100000" kx="0" ky="0" algn="bl" rotWithShape="0" blurRad="101600" dist="38100" dir="16200000">
+              <a:srgbClr val="000000">
+                <a:alpha val="12000"/>
+              </a:srgbClr>
+            </a:outerShdw>
+          </a:effectLst>
+        </p:spPr>
+      </p:sp>
+      <p:sp>
+        <p:nvSpPr>
+          <p:cNvPr id="14" name="Text 12"/>
+          <p:cNvSpPr/>
+          <p:nvPr/>
+        </p:nvSpPr>
+        <p:spPr>
+          <a:xfrm>
+            <a:off x="822960" y="4114800"/>
+            <a:ext cx="1645920" cy="685800"/>
+          </a:xfrm>
+          <a:prstGeom prst="rect">
+            <a:avLst/>
+          </a:prstGeom>
+          <a:noFill/>
+          <a:ln/>
+        </p:spPr>
+        <p:txBody>
+          <a:bodyPr wrap="square" lIns="0" tIns="0" rIns="0" bIns="0" rtlCol="0" anchor="ctr"/>
+          <a:lstStyle/>
+          <a:p>
+            <a:pPr indent="0" marL="0">
+              <a:buNone/>
+            </a:pPr>
+            <a:r>
+              <a:rPr lang="en-US" sz="3000" b="1" dirty="0">
+                <a:solidFill>
+                  <a:srgbClr val="F59E0B"/>
+                </a:solidFill>
+                <a:latin typeface="Georgia" pitchFamily="34" charset="0"/>
+                <a:ea typeface="Georgia" pitchFamily="34" charset="-122"/>
+                <a:cs typeface="Georgia" pitchFamily="34" charset="-120"/>
+              </a:rPr>
+              <a:t>0</a:t>
+            </a:r>
+            <a:endParaRPr lang="en-US" sz="3000" dirty="0"/>
+          </a:p>
+        </p:txBody>
+      </p:sp>
+      <p:sp>
+        <p:nvSpPr>
+          <p:cNvPr id="15" name="Text 13"/>
+          <p:cNvSpPr/>
+          <p:nvPr/>
+        </p:nvSpPr>
+        <p:spPr>
+          <a:xfrm>
+            <a:off x="2560320" y="4114800"/>
+            <a:ext cx="5760720" cy="685800"/>
+          </a:xfrm>
+          <a:prstGeom prst="rect">
+            <a:avLst/>
+          </a:prstGeom>
+          <a:noFill/>
+          <a:ln/>
+        </p:spPr>
+        <p:txBody>
+          <a:bodyPr wrap="square" lIns="0" tIns="0" rIns="0" bIns="0" rtlCol="0" anchor="ctr"/>
+          <a:lstStyle/>
+          <a:p>
+            <a:pPr indent="0" marL="0">
+              <a:buNone/>
+            </a:pPr>
+            <a:r>
+              <a:rPr lang="en-US" sz="1300" dirty="0">
+                <a:solidFill>
+                  <a:srgbClr val="1E293B"/>
+                </a:solidFill>
+                <a:latin typeface="Calibri" pitchFamily="34" charset="0"/>
+                <a:ea typeface="Calibri" pitchFamily="34" charset="-122"/>
+                <a:cs typeface="Calibri" pitchFamily="34" charset="-120"/>
+              </a:rPr>
               <a:t>standardised tools exist for adversarial testing of AI agents at scale</a:t>
             </a:r>
-            <a:endParaRPr lang="en-US" sz="1400" dirty="0"/>
-          </a:p>
-        </p:txBody>
-      </p:sp>
-      <p:sp>
-        <p:nvSpPr>
-          <p:cNvPr id="13" name="Shape 11"/>
-          <p:cNvSpPr/>
-          <p:nvPr/>
-        </p:nvSpPr>
-        <p:spPr>
-          <a:xfrm>
-            <a:off x="640080" y="4572000"/>
+            <a:endParaRPr lang="en-US" sz="1300" dirty="0"/>
+          </a:p>
+        </p:txBody>
+      </p:sp>
+      <p:sp>
+        <p:nvSpPr>
+          <p:cNvPr id="16" name="Shape 14"/>
+          <p:cNvSpPr/>
+          <p:nvPr/>
+        </p:nvSpPr>
+        <p:spPr>
+          <a:xfrm>
+            <a:off x="640080" y="4663440"/>
             <a:ext cx="7863840" cy="36576"/>
           </a:xfrm>
           <a:prstGeom prst="rect">
@@ -4014,7 +4119,7 @@
                 <a:ea typeface="Calibri" pitchFamily="34" charset="-122"/>
                 <a:cs typeface="Calibri" pitchFamily="34" charset="-120"/>
               </a:rPr>
-              <a:t>ARIA Evaluator: Automated AI agent testing &amp; safety scoring</a:t>
+              <a:t>ARIA Evaluator: Automated AI agent testing, safety scoring &amp; model risk validation</a:t>
             </a:r>
             <a:endParaRPr lang="en-US" sz="1400" dirty="0"/>
           </a:p>
@@ -4028,8 +4133,8 @@
         </p:nvSpPr>
         <p:spPr>
           <a:xfrm>
-            <a:off x="640080" y="1737360"/>
-            <a:ext cx="3749040" cy="1280160"/>
+            <a:off x="457200" y="1691640"/>
+            <a:ext cx="2606040" cy="1280160"/>
           </a:xfrm>
           <a:prstGeom prst="rect">
             <a:avLst/>
@@ -4055,7 +4160,7 @@
         </p:nvSpPr>
         <p:spPr>
           <a:xfrm>
-            <a:off x="640080" y="1737360"/>
+            <a:off x="457200" y="1691640"/>
             <a:ext cx="64008" cy="1280160"/>
           </a:xfrm>
           <a:prstGeom prst="rect">
@@ -4075,8 +4180,8 @@
         </p:nvSpPr>
         <p:spPr>
           <a:xfrm>
-            <a:off x="914400" y="1874520"/>
-            <a:ext cx="3291840" cy="365760"/>
+            <a:off x="685800" y="1783080"/>
+            <a:ext cx="2240280" cy="365760"/>
           </a:xfrm>
           <a:prstGeom prst="rect">
             <a:avLst/>
@@ -4092,7 +4197,7 @@
               <a:buNone/>
             </a:pPr>
             <a:r>
-              <a:rPr lang="en-US" sz="1600" b="1" dirty="0">
+              <a:rPr lang="en-US" sz="1400" b="1" dirty="0">
                 <a:solidFill>
                   <a:srgbClr val="0B1F4D"/>
                 </a:solidFill>
@@ -4100,9 +4205,9 @@
                 <a:ea typeface="Calibri" pitchFamily="34" charset="-122"/>
                 <a:cs typeface="Calibri" pitchFamily="34" charset="-120"/>
               </a:rPr>
-              <a:t>149 Adversarial Scenarios</a:t>
-            </a:r>
-            <a:endParaRPr lang="en-US" sz="1600" dirty="0"/>
+              <a:t>149+ Adversarial Scenarios</a:t>
+            </a:r>
+            <a:endParaRPr lang="en-US" sz="1400" dirty="0"/>
           </a:p>
         </p:txBody>
       </p:sp>
@@ -4114,8 +4219,8 @@
         </p:nvSpPr>
         <p:spPr>
           <a:xfrm>
-            <a:off x="914400" y="2240280"/>
-            <a:ext cx="3291840" cy="640080"/>
+            <a:off x="685800" y="2148840"/>
+            <a:ext cx="2240280" cy="685800"/>
           </a:xfrm>
           <a:prstGeom prst="rect">
             <a:avLst/>
@@ -4131,7 +4236,7 @@
               <a:buNone/>
             </a:pPr>
             <a:r>
-              <a:rPr lang="en-US" sz="1200" dirty="0">
+              <a:rPr lang="en-US" sz="1100" dirty="0">
                 <a:solidFill>
                   <a:srgbClr val="64748B"/>
                 </a:solidFill>
@@ -4141,7 +4246,7 @@
               </a:rPr>
               <a:t>14 categories including prompt injection, PII leakage, bias detection, RAG poisoning</a:t>
             </a:r>
-            <a:endParaRPr lang="en-US" sz="1200" dirty="0"/>
+            <a:endParaRPr lang="en-US" sz="1100" dirty="0"/>
           </a:p>
         </p:txBody>
       </p:sp>
@@ -4153,8 +4258,8 @@
         </p:nvSpPr>
         <p:spPr>
           <a:xfrm>
-            <a:off x="4754880" y="1737360"/>
-            <a:ext cx="3749040" cy="1280160"/>
+            <a:off x="3291840" y="1691640"/>
+            <a:ext cx="2606040" cy="1280160"/>
           </a:xfrm>
           <a:prstGeom prst="rect">
             <a:avLst/>
@@ -4180,7 +4285,7 @@
         </p:nvSpPr>
         <p:spPr>
           <a:xfrm>
-            <a:off x="4754880" y="1737360"/>
+            <a:off x="3291840" y="1691640"/>
             <a:ext cx="64008" cy="1280160"/>
           </a:xfrm>
           <a:prstGeom prst="rect">
@@ -4200,8 +4305,8 @@
         </p:nvSpPr>
         <p:spPr>
           <a:xfrm>
-            <a:off x="5029200" y="1874520"/>
-            <a:ext cx="3291840" cy="365760"/>
+            <a:off x="3520440" y="1783080"/>
+            <a:ext cx="2240280" cy="365760"/>
           </a:xfrm>
           <a:prstGeom prst="rect">
             <a:avLst/>
@@ -4217,7 +4322,7 @@
               <a:buNone/>
             </a:pPr>
             <a:r>
-              <a:rPr lang="en-US" sz="1600" b="1" dirty="0">
+              <a:rPr lang="en-US" sz="1400" b="1" dirty="0">
                 <a:solidFill>
                   <a:srgbClr val="0B1F4D"/>
                 </a:solidFill>
@@ -4227,7 +4332,7 @@
               </a:rPr>
               <a:t>Automated Scoring</a:t>
             </a:r>
-            <a:endParaRPr lang="en-US" sz="1600" dirty="0"/>
+            <a:endParaRPr lang="en-US" sz="1400" dirty="0"/>
           </a:p>
         </p:txBody>
       </p:sp>
@@ -4239,8 +4344,8 @@
         </p:nvSpPr>
         <p:spPr>
           <a:xfrm>
-            <a:off x="5029200" y="2240280"/>
-            <a:ext cx="3291840" cy="640080"/>
+            <a:off x="3520440" y="2148840"/>
+            <a:ext cx="2240280" cy="685800"/>
           </a:xfrm>
           <a:prstGeom prst="rect">
             <a:avLst/>
@@ -4256,7 +4361,7 @@
               <a:buNone/>
             </a:pPr>
             <a:r>
-              <a:rPr lang="en-US" sz="1200" dirty="0">
+              <a:rPr lang="en-US" sz="1100" dirty="0">
                 <a:solidFill>
                   <a:srgbClr val="64748B"/>
                 </a:solidFill>
@@ -4266,7 +4371,7 @@
               </a:rPr>
               <a:t>AI-powered safety, accuracy, and helpfulness scoring with quality badges</a:t>
             </a:r>
-            <a:endParaRPr lang="en-US" sz="1200" dirty="0"/>
+            <a:endParaRPr lang="en-US" sz="1100" dirty="0"/>
           </a:p>
         </p:txBody>
       </p:sp>
@@ -4278,8 +4383,8 @@
         </p:nvSpPr>
         <p:spPr>
           <a:xfrm>
-            <a:off x="640080" y="3291840"/>
-            <a:ext cx="3749040" cy="1280160"/>
+            <a:off x="6126480" y="1691640"/>
+            <a:ext cx="2606040" cy="1280160"/>
           </a:xfrm>
           <a:prstGeom prst="rect">
             <a:avLst/>
@@ -4305,14 +4410,14 @@
         </p:nvSpPr>
         <p:spPr>
           <a:xfrm>
-            <a:off x="640080" y="3291840"/>
+            <a:off x="6126480" y="1691640"/>
             <a:ext cx="64008" cy="1280160"/>
           </a:xfrm>
           <a:prstGeom prst="rect">
             <a:avLst/>
           </a:prstGeom>
           <a:solidFill>
-            <a:srgbClr val="00A896"/>
+            <a:srgbClr val="F59E0B"/>
           </a:solidFill>
           <a:ln/>
         </p:spPr>
@@ -4325,8 +4430,8 @@
         </p:nvSpPr>
         <p:spPr>
           <a:xfrm>
-            <a:off x="914400" y="3429000"/>
-            <a:ext cx="3291840" cy="365760"/>
+            <a:off x="6355080" y="1783080"/>
+            <a:ext cx="2240280" cy="365760"/>
           </a:xfrm>
           <a:prstGeom prst="rect">
             <a:avLst/>
@@ -4342,7 +4447,7 @@
               <a:buNone/>
             </a:pPr>
             <a:r>
-              <a:rPr lang="en-US" sz="1600" b="1" dirty="0">
+              <a:rPr lang="en-US" sz="1400" b="1" dirty="0">
                 <a:solidFill>
                   <a:srgbClr val="0B1F4D"/>
                 </a:solidFill>
@@ -4350,9 +4455,9 @@
                 <a:ea typeface="Calibri" pitchFamily="34" charset="-122"/>
                 <a:cs typeface="Calibri" pitchFamily="34" charset="-120"/>
               </a:rPr>
-              <a:t>Real-Time Transcripts</a:t>
-            </a:r>
-            <a:endParaRPr lang="en-US" sz="1600" dirty="0"/>
+              <a:t>Model Risk Validation</a:t>
+            </a:r>
+            <a:endParaRPr lang="en-US" sz="1400" dirty="0"/>
           </a:p>
         </p:txBody>
       </p:sp>
@@ -4364,8 +4469,8 @@
         </p:nvSpPr>
         <p:spPr>
           <a:xfrm>
-            <a:off x="914400" y="3794760"/>
-            <a:ext cx="3291840" cy="640080"/>
+            <a:off x="6355080" y="2148840"/>
+            <a:ext cx="2240280" cy="685800"/>
           </a:xfrm>
           <a:prstGeom prst="rect">
             <a:avLst/>
@@ -4381,7 +4486,7 @@
               <a:buNone/>
             </a:pPr>
             <a:r>
-              <a:rPr lang="en-US" sz="1200" dirty="0">
+              <a:rPr lang="en-US" sz="1100" dirty="0">
                 <a:solidFill>
                   <a:srgbClr val="64748B"/>
                 </a:solidFill>
@@ -4389,9 +4494,9 @@
                 <a:ea typeface="Calibri" pitchFamily="34" charset="-122"/>
                 <a:cs typeface="Calibri" pitchFamily="34" charset="-120"/>
               </a:rPr>
-              <a:t>Watch agent conversations live, replay and analyse failures</a:t>
-            </a:r>
-            <a:endParaRPr lang="en-US" sz="1200" dirty="0"/>
+              <a:t>Quantitative &amp; qualitative risk measures — accelerate MRM cycles from months to days</a:t>
+            </a:r>
+            <a:endParaRPr lang="en-US" sz="1100" dirty="0"/>
           </a:p>
         </p:txBody>
       </p:sp>
@@ -4403,8 +4508,8 @@
         </p:nvSpPr>
         <p:spPr>
           <a:xfrm>
-            <a:off x="4754880" y="3291840"/>
-            <a:ext cx="3749040" cy="1280160"/>
+            <a:off x="457200" y="3246120"/>
+            <a:ext cx="2606040" cy="1280160"/>
           </a:xfrm>
           <a:prstGeom prst="rect">
             <a:avLst/>
@@ -4430,7 +4535,7 @@
         </p:nvSpPr>
         <p:spPr>
           <a:xfrm>
-            <a:off x="4754880" y="3291840"/>
+            <a:off x="457200" y="3246120"/>
             <a:ext cx="64008" cy="1280160"/>
           </a:xfrm>
           <a:prstGeom prst="rect">
@@ -4450,8 +4555,8 @@
         </p:nvSpPr>
         <p:spPr>
           <a:xfrm>
-            <a:off x="5029200" y="3429000"/>
-            <a:ext cx="3291840" cy="365760"/>
+            <a:off x="685800" y="3337560"/>
+            <a:ext cx="2240280" cy="365760"/>
           </a:xfrm>
           <a:prstGeom prst="rect">
             <a:avLst/>
@@ -4467,7 +4572,7 @@
               <a:buNone/>
             </a:pPr>
             <a:r>
-              <a:rPr lang="en-US" sz="1600" b="1" dirty="0">
+              <a:rPr lang="en-US" sz="1400" b="1" dirty="0">
                 <a:solidFill>
                   <a:srgbClr val="0B1F4D"/>
                 </a:solidFill>
@@ -4475,9 +4580,9 @@
                 <a:ea typeface="Calibri" pitchFamily="34" charset="-122"/>
                 <a:cs typeface="Calibri" pitchFamily="34" charset="-120"/>
               </a:rPr>
-              <a:t>Multi-Model Support</a:t>
-            </a:r>
-            <a:endParaRPr lang="en-US" sz="1600" dirty="0"/>
+              <a:t>Real-Time Transcripts</a:t>
+            </a:r>
+            <a:endParaRPr lang="en-US" sz="1400" dirty="0"/>
           </a:p>
         </p:txBody>
       </p:sp>
@@ -4489,8 +4594,8 @@
         </p:nvSpPr>
         <p:spPr>
           <a:xfrm>
-            <a:off x="5029200" y="3794760"/>
-            <a:ext cx="3291840" cy="640080"/>
+            <a:off x="685800" y="3703320"/>
+            <a:ext cx="2240280" cy="685800"/>
           </a:xfrm>
           <a:prstGeom prst="rect">
             <a:avLst/>
@@ -4506,7 +4611,7 @@
               <a:buNone/>
             </a:pPr>
             <a:r>
-              <a:rPr lang="en-US" sz="1200" dirty="0">
+              <a:rPr lang="en-US" sz="1100" dirty="0">
                 <a:solidFill>
                   <a:srgbClr val="64748B"/>
                 </a:solidFill>
@@ -4514,9 +4619,259 @@
                 <a:ea typeface="Calibri" pitchFamily="34" charset="-122"/>
                 <a:cs typeface="Calibri" pitchFamily="34" charset="-120"/>
               </a:rPr>
+              <a:t>Watch agent conversations live, replay and analyse failures</a:t>
+            </a:r>
+            <a:endParaRPr lang="en-US" sz="1100" dirty="0"/>
+          </a:p>
+        </p:txBody>
+      </p:sp>
+      <p:sp>
+        <p:nvSpPr>
+          <p:cNvPr id="20" name="Shape 18"/>
+          <p:cNvSpPr/>
+          <p:nvPr/>
+        </p:nvSpPr>
+        <p:spPr>
+          <a:xfrm>
+            <a:off x="3291840" y="3246120"/>
+            <a:ext cx="2606040" cy="1280160"/>
+          </a:xfrm>
+          <a:prstGeom prst="rect">
+            <a:avLst/>
+          </a:prstGeom>
+          <a:solidFill>
+            <a:srgbClr val="F0FAFA"/>
+          </a:solidFill>
+          <a:ln/>
+          <a:effectLst>
+            <a:outerShdw sx="100000" sy="100000" kx="0" ky="0" algn="bl" rotWithShape="0" blurRad="101600" dist="38100" dir="16200000">
+              <a:srgbClr val="000000">
+                <a:alpha val="12000"/>
+              </a:srgbClr>
+            </a:outerShdw>
+          </a:effectLst>
+        </p:spPr>
+      </p:sp>
+      <p:sp>
+        <p:nvSpPr>
+          <p:cNvPr id="21" name="Shape 19"/>
+          <p:cNvSpPr/>
+          <p:nvPr/>
+        </p:nvSpPr>
+        <p:spPr>
+          <a:xfrm>
+            <a:off x="3291840" y="3246120"/>
+            <a:ext cx="64008" cy="1280160"/>
+          </a:xfrm>
+          <a:prstGeom prst="rect">
+            <a:avLst/>
+          </a:prstGeom>
+          <a:solidFill>
+            <a:srgbClr val="00A896"/>
+          </a:solidFill>
+          <a:ln/>
+        </p:spPr>
+      </p:sp>
+      <p:sp>
+        <p:nvSpPr>
+          <p:cNvPr id="22" name="Text 20"/>
+          <p:cNvSpPr/>
+          <p:nvPr/>
+        </p:nvSpPr>
+        <p:spPr>
+          <a:xfrm>
+            <a:off x="3520440" y="3337560"/>
+            <a:ext cx="2240280" cy="365760"/>
+          </a:xfrm>
+          <a:prstGeom prst="rect">
+            <a:avLst/>
+          </a:prstGeom>
+          <a:noFill/>
+          <a:ln/>
+        </p:spPr>
+        <p:txBody>
+          <a:bodyPr wrap="square" lIns="0" tIns="0" rIns="0" bIns="0" rtlCol="0" anchor="ctr"/>
+          <a:lstStyle/>
+          <a:p>
+            <a:pPr indent="0" marL="0">
+              <a:buNone/>
+            </a:pPr>
+            <a:r>
+              <a:rPr lang="en-US" sz="1400" b="1" dirty="0">
+                <a:solidFill>
+                  <a:srgbClr val="0B1F4D"/>
+                </a:solidFill>
+                <a:latin typeface="Calibri" pitchFamily="34" charset="0"/>
+                <a:ea typeface="Calibri" pitchFamily="34" charset="-122"/>
+                <a:cs typeface="Calibri" pitchFamily="34" charset="-120"/>
+              </a:rPr>
+              <a:t>Multi-Model Support</a:t>
+            </a:r>
+            <a:endParaRPr lang="en-US" sz="1400" dirty="0"/>
+          </a:p>
+        </p:txBody>
+      </p:sp>
+      <p:sp>
+        <p:nvSpPr>
+          <p:cNvPr id="23" name="Text 21"/>
+          <p:cNvSpPr/>
+          <p:nvPr/>
+        </p:nvSpPr>
+        <p:spPr>
+          <a:xfrm>
+            <a:off x="3520440" y="3703320"/>
+            <a:ext cx="2240280" cy="685800"/>
+          </a:xfrm>
+          <a:prstGeom prst="rect">
+            <a:avLst/>
+          </a:prstGeom>
+          <a:noFill/>
+          <a:ln/>
+        </p:spPr>
+        <p:txBody>
+          <a:bodyPr wrap="square" lIns="0" tIns="0" rIns="0" bIns="0" rtlCol="0" anchor="ctr"/>
+          <a:lstStyle/>
+          <a:p>
+            <a:pPr indent="0" marL="0">
+              <a:buNone/>
+            </a:pPr>
+            <a:r>
+              <a:rPr lang="en-US" sz="1100" dirty="0">
+                <a:solidFill>
+                  <a:srgbClr val="64748B"/>
+                </a:solidFill>
+                <a:latin typeface="Calibri" pitchFamily="34" charset="0"/>
+                <a:ea typeface="Calibri" pitchFamily="34" charset="-122"/>
+                <a:cs typeface="Calibri" pitchFamily="34" charset="-120"/>
+              </a:rPr>
               <a:t>Test across Claude, GPT-4, Llama, Mistral and custom models</a:t>
             </a:r>
-            <a:endParaRPr lang="en-US" sz="1200" dirty="0"/>
+            <a:endParaRPr lang="en-US" sz="1100" dirty="0"/>
+          </a:p>
+        </p:txBody>
+      </p:sp>
+      <p:sp>
+        <p:nvSpPr>
+          <p:cNvPr id="24" name="Shape 22"/>
+          <p:cNvSpPr/>
+          <p:nvPr/>
+        </p:nvSpPr>
+        <p:spPr>
+          <a:xfrm>
+            <a:off x="6126480" y="3246120"/>
+            <a:ext cx="2606040" cy="1280160"/>
+          </a:xfrm>
+          <a:prstGeom prst="rect">
+            <a:avLst/>
+          </a:prstGeom>
+          <a:solidFill>
+            <a:srgbClr val="F0FAFA"/>
+          </a:solidFill>
+          <a:ln/>
+          <a:effectLst>
+            <a:outerShdw sx="100000" sy="100000" kx="0" ky="0" algn="bl" rotWithShape="0" blurRad="101600" dist="38100" dir="16200000">
+              <a:srgbClr val="000000">
+                <a:alpha val="12000"/>
+              </a:srgbClr>
+            </a:outerShdw>
+          </a:effectLst>
+        </p:spPr>
+      </p:sp>
+      <p:sp>
+        <p:nvSpPr>
+          <p:cNvPr id="25" name="Shape 23"/>
+          <p:cNvSpPr/>
+          <p:nvPr/>
+        </p:nvSpPr>
+        <p:spPr>
+          <a:xfrm>
+            <a:off x="6126480" y="3246120"/>
+            <a:ext cx="64008" cy="1280160"/>
+          </a:xfrm>
+          <a:prstGeom prst="rect">
+            <a:avLst/>
+          </a:prstGeom>
+          <a:solidFill>
+            <a:srgbClr val="00A896"/>
+          </a:solidFill>
+          <a:ln/>
+        </p:spPr>
+      </p:sp>
+      <p:sp>
+        <p:nvSpPr>
+          <p:cNvPr id="26" name="Text 24"/>
+          <p:cNvSpPr/>
+          <p:nvPr/>
+        </p:nvSpPr>
+        <p:spPr>
+          <a:xfrm>
+            <a:off x="6355080" y="3337560"/>
+            <a:ext cx="2240280" cy="365760"/>
+          </a:xfrm>
+          <a:prstGeom prst="rect">
+            <a:avLst/>
+          </a:prstGeom>
+          <a:noFill/>
+          <a:ln/>
+        </p:spPr>
+        <p:txBody>
+          <a:bodyPr wrap="square" lIns="0" tIns="0" rIns="0" bIns="0" rtlCol="0" anchor="ctr"/>
+          <a:lstStyle/>
+          <a:p>
+            <a:pPr indent="0" marL="0">
+              <a:buNone/>
+            </a:pPr>
+            <a:r>
+              <a:rPr lang="en-US" sz="1400" b="1" dirty="0">
+                <a:solidFill>
+                  <a:srgbClr val="0B1F4D"/>
+                </a:solidFill>
+                <a:latin typeface="Calibri" pitchFamily="34" charset="0"/>
+                <a:ea typeface="Calibri" pitchFamily="34" charset="-122"/>
+                <a:cs typeface="Calibri" pitchFamily="34" charset="-120"/>
+              </a:rPr>
+              <a:t>Compliance Evidence</a:t>
+            </a:r>
+            <a:endParaRPr lang="en-US" sz="1400" dirty="0"/>
+          </a:p>
+        </p:txBody>
+      </p:sp>
+      <p:sp>
+        <p:nvSpPr>
+          <p:cNvPr id="27" name="Text 25"/>
+          <p:cNvSpPr/>
+          <p:nvPr/>
+        </p:nvSpPr>
+        <p:spPr>
+          <a:xfrm>
+            <a:off x="6355080" y="3703320"/>
+            <a:ext cx="2240280" cy="685800"/>
+          </a:xfrm>
+          <a:prstGeom prst="rect">
+            <a:avLst/>
+          </a:prstGeom>
+          <a:noFill/>
+          <a:ln/>
+        </p:spPr>
+        <p:txBody>
+          <a:bodyPr wrap="square" lIns="0" tIns="0" rIns="0" bIns="0" rtlCol="0" anchor="ctr"/>
+          <a:lstStyle/>
+          <a:p>
+            <a:pPr indent="0" marL="0">
+              <a:buNone/>
+            </a:pPr>
+            <a:r>
+              <a:rPr lang="en-US" sz="1100" dirty="0">
+                <a:solidFill>
+                  <a:srgbClr val="64748B"/>
+                </a:solidFill>
+                <a:latin typeface="Calibri" pitchFamily="34" charset="0"/>
+                <a:ea typeface="Calibri" pitchFamily="34" charset="-122"/>
+                <a:cs typeface="Calibri" pitchFamily="34" charset="-120"/>
+              </a:rPr>
+              <a:t>Auto-generated audit trails, scoring reports and risk documentation for regulators</a:t>
+            </a:r>
+            <a:endParaRPr lang="en-US" sz="1100" dirty="0"/>
           </a:p>
         </p:txBody>
       </p:sp>
@@ -8400,6 +8755,45 @@
           </a:p>
         </p:txBody>
       </p:sp>
+      <p:sp>
+        <p:nvSpPr>
+          <p:cNvPr id="3" name="Text 1"/>
+          <p:cNvSpPr/>
+          <p:nvPr/>
+        </p:nvSpPr>
+        <p:spPr>
+          <a:xfrm>
+            <a:off x="640080" y="960120"/>
+            <a:ext cx="7772400" cy="320040"/>
+          </a:xfrm>
+          <a:prstGeom prst="rect">
+            <a:avLst/>
+          </a:prstGeom>
+          <a:noFill/>
+          <a:ln/>
+        </p:spPr>
+        <p:txBody>
+          <a:bodyPr wrap="square" lIns="0" tIns="0" rIns="0" bIns="0" rtlCol="0" anchor="ctr"/>
+          <a:lstStyle/>
+          <a:p>
+            <a:pPr indent="0" marL="0">
+              <a:buNone/>
+            </a:pPr>
+            <a:r>
+              <a:rPr lang="en-US" sz="1200" i="1" dirty="0">
+                <a:solidFill>
+                  <a:srgbClr val="64748B"/>
+                </a:solidFill>
+                <a:latin typeface="Calibri" pitchFamily="34" charset="0"/>
+                <a:ea typeface="Calibri" pitchFamily="34" charset="-122"/>
+                <a:cs typeface="Calibri" pitchFamily="34" charset="-120"/>
+              </a:rPr>
+              <a:t>$1.9B+ market (2025) growing 30%+ CAGR — most competitors focus on observability, not offense</a:t>
+            </a:r>
+            <a:endParaRPr lang="en-US" sz="1200" dirty="0"/>
+          </a:p>
+        </p:txBody>
+      </p:sp>
       <p:graphicFrame>
         <p:nvGraphicFramePr>
           <p:cNvPr id="10" name="Table 0"/>
@@ -8415,20 +8809,22 @@
           </p:nvPr>
         </p:nvGraphicFramePr>
         <p:xfrm>
-          <a:off x="457200" y="1188720"/>
-          <a:ext cx="8229600" cy="3474720"/>
+          <a:off x="274320" y="1371600"/>
+          <a:ext cx="8595360" cy="3291840"/>
         </p:xfrm>
         <a:graphic>
           <a:graphicData uri="http://schemas.openxmlformats.org/drawingml/2006/table">
             <a:tbl>
               <a:tblPr/>
               <a:tblGrid>
-                <a:gridCol w="2011680"/>
-                <a:gridCol w="2194560"/>
-                <a:gridCol w="2011680"/>
-                <a:gridCol w="2011680"/>
+                <a:gridCol w="1188720"/>
+                <a:gridCol w="1371600"/>
+                <a:gridCol w="1280160"/>
+                <a:gridCol w="1280160"/>
+                <a:gridCol w="1280160"/>
+                <a:gridCol w="1280160"/>
               </a:tblGrid>
-              <a:tr h="384048">
+              <a:tr h="347472">
                 <a:tc>
                   <a:txBody>
                     <a:bodyPr/>
@@ -8438,7 +8834,7 @@
                         <a:buNone/>
                       </a:pPr>
                       <a:r>
-                        <a:rPr lang="en-US" sz="1200" b="1" dirty="0">
+                        <a:rPr lang="en-US" sz="1100" b="1" dirty="0">
                           <a:solidFill>
                             <a:srgbClr val="FFFFFF"/>
                           </a:solidFill>
@@ -8448,7 +8844,7 @@
                         </a:rPr>
                         <a:t>Capability</a:t>
                       </a:r>
-                      <a:endParaRPr lang="en-US" sz="1200" dirty="0">
+                      <a:endParaRPr lang="en-US" sz="1100" dirty="0">
                         <a:latin typeface="Calibri" charset="0"/>
                         <a:ea typeface="Calibri" charset="0"/>
                         <a:cs typeface="Calibri" charset="0"/>
@@ -8506,7 +8902,7 @@
                         <a:buNone/>
                       </a:pPr>
                       <a:r>
-                        <a:rPr lang="en-US" sz="1200" b="1" dirty="0">
+                        <a:rPr lang="en-US" sz="1100" b="1" dirty="0">
                           <a:solidFill>
                             <a:srgbClr val="FFFFFF"/>
                           </a:solidFill>
@@ -8514,9 +8910,9 @@
                           <a:ea typeface="Calibri" pitchFamily="34" charset="-122"/>
                           <a:cs typeface="Calibri" pitchFamily="34" charset="-120"/>
                         </a:rPr>
-                        <a:t>ARIA Evaluator</a:t>
+                        <a:t>ARIA</a:t>
                       </a:r>
-                      <a:endParaRPr lang="en-US" sz="1200" dirty="0">
+                      <a:endParaRPr lang="en-US" sz="1100" dirty="0">
                         <a:latin typeface="Calibri" charset="0"/>
                         <a:ea typeface="Calibri" charset="0"/>
                         <a:cs typeface="Calibri" charset="0"/>
@@ -8574,7 +8970,7 @@
                         <a:buNone/>
                       </a:pPr>
                       <a:r>
-                        <a:rPr lang="en-US" sz="1200" b="1" dirty="0">
+                        <a:rPr lang="en-US" sz="1100" b="1" dirty="0">
                           <a:solidFill>
                             <a:srgbClr val="FFFFFF"/>
                           </a:solidFill>
@@ -8582,9 +8978,9 @@
                           <a:ea typeface="Calibri" pitchFamily="34" charset="-122"/>
                           <a:cs typeface="Calibri" pitchFamily="34" charset="-120"/>
                         </a:rPr>
-                        <a:t>Manual QA</a:t>
+                        <a:t>Maxim AI</a:t>
                       </a:r>
-                      <a:endParaRPr lang="en-US" sz="1200" dirty="0">
+                      <a:endParaRPr lang="en-US" sz="1100" dirty="0">
                         <a:latin typeface="Calibri" charset="0"/>
                         <a:ea typeface="Calibri" charset="0"/>
                         <a:cs typeface="Calibri" charset="0"/>
@@ -8642,7 +9038,7 @@
                         <a:buNone/>
                       </a:pPr>
                       <a:r>
-                        <a:rPr lang="en-US" sz="1200" b="1" dirty="0">
+                        <a:rPr lang="en-US" sz="1100" b="1" dirty="0">
                           <a:solidFill>
                             <a:srgbClr val="FFFFFF"/>
                           </a:solidFill>
@@ -8650,9 +9046,9 @@
                           <a:ea typeface="Calibri" pitchFamily="34" charset="-122"/>
                           <a:cs typeface="Calibri" pitchFamily="34" charset="-120"/>
                         </a:rPr>
-                        <a:t>Generic LLM Testing</a:t>
+                        <a:t>Galileo</a:t>
                       </a:r>
-                      <a:endParaRPr lang="en-US" sz="1200" dirty="0">
+                      <a:endParaRPr lang="en-US" sz="1100" dirty="0">
                         <a:latin typeface="Calibri" charset="0"/>
                         <a:ea typeface="Calibri" charset="0"/>
                         <a:cs typeface="Calibri" charset="0"/>
@@ -8701,8 +9097,6 @@
                     </a:solidFill>
                   </a:tcPr>
                 </a:tc>
-              </a:tr>
-              <a:tr h="384048">
                 <a:tc>
                   <a:txBody>
                     <a:bodyPr/>
@@ -8712,7 +9106,145 @@
                         <a:buNone/>
                       </a:pPr>
                       <a:r>
-                        <a:rPr lang="en-US" sz="1200" dirty="0">
+                        <a:rPr lang="en-US" sz="1100" b="1" dirty="0">
+                          <a:solidFill>
+                            <a:srgbClr val="FFFFFF"/>
+                          </a:solidFill>
+                          <a:latin typeface="Calibri" pitchFamily="34" charset="0"/>
+                          <a:ea typeface="Calibri" pitchFamily="34" charset="-122"/>
+                          <a:cs typeface="Calibri" pitchFamily="34" charset="-120"/>
+                        </a:rPr>
+                        <a:t>LangSmith</a:t>
+                      </a:r>
+                      <a:endParaRPr lang="en-US" sz="1100" dirty="0">
+                        <a:latin typeface="Calibri" charset="0"/>
+                        <a:ea typeface="Calibri" charset="0"/>
+                        <a:cs typeface="Calibri" charset="0"/>
+                      </a:endParaRPr>
+                    </a:p>
+                  </a:txBody>
+                  <a:tcPr marL="91440" marR="91440" marT="45720" marB="45720">
+                    <a:lnL w="6350" cap="flat" cmpd="sng" algn="ctr">
+                      <a:solidFill>
+                        <a:srgbClr val="E2E8F0"/>
+                      </a:solidFill>
+                      <a:prstDash val="solid"/>
+                      <a:round/>
+                      <a:headEnd type="none" w="med" len="med"/>
+                      <a:tailEnd type="none" w="med" len="med"/>
+                    </a:lnL>
+                    <a:lnR w="6350" cap="flat" cmpd="sng" algn="ctr">
+                      <a:solidFill>
+                        <a:srgbClr val="E2E8F0"/>
+                      </a:solidFill>
+                      <a:prstDash val="solid"/>
+                      <a:round/>
+                      <a:headEnd type="none" w="med" len="med"/>
+                      <a:tailEnd type="none" w="med" len="med"/>
+                    </a:lnR>
+                    <a:lnT w="6350" cap="flat" cmpd="sng" algn="ctr">
+                      <a:solidFill>
+                        <a:srgbClr val="E2E8F0"/>
+                      </a:solidFill>
+                      <a:prstDash val="solid"/>
+                      <a:round/>
+                      <a:headEnd type="none" w="med" len="med"/>
+                      <a:tailEnd type="none" w="med" len="med"/>
+                    </a:lnT>
+                    <a:lnB w="6350" cap="flat" cmpd="sng" algn="ctr">
+                      <a:solidFill>
+                        <a:srgbClr val="E2E8F0"/>
+                      </a:solidFill>
+                      <a:prstDash val="solid"/>
+                      <a:round/>
+                      <a:headEnd type="none" w="med" len="med"/>
+                      <a:tailEnd type="none" w="med" len="med"/>
+                    </a:lnB>
+                    <a:solidFill>
+                      <a:srgbClr val="64748B"/>
+                    </a:solidFill>
+                  </a:tcPr>
+                </a:tc>
+                <a:tc>
+                  <a:txBody>
+                    <a:bodyPr/>
+                    <a:lstStyle/>
+                    <a:p>
+                      <a:pPr indent="0" marL="0">
+                        <a:buNone/>
+                      </a:pPr>
+                      <a:r>
+                        <a:rPr lang="en-US" sz="1100" b="1" dirty="0">
+                          <a:solidFill>
+                            <a:srgbClr val="FFFFFF"/>
+                          </a:solidFill>
+                          <a:latin typeface="Calibri" pitchFamily="34" charset="0"/>
+                          <a:ea typeface="Calibri" pitchFamily="34" charset="-122"/>
+                          <a:cs typeface="Calibri" pitchFamily="34" charset="-120"/>
+                        </a:rPr>
+                        <a:t>Arize AI</a:t>
+                      </a:r>
+                      <a:endParaRPr lang="en-US" sz="1100" dirty="0">
+                        <a:latin typeface="Calibri" charset="0"/>
+                        <a:ea typeface="Calibri" charset="0"/>
+                        <a:cs typeface="Calibri" charset="0"/>
+                      </a:endParaRPr>
+                    </a:p>
+                  </a:txBody>
+                  <a:tcPr marL="91440" marR="91440" marT="45720" marB="45720">
+                    <a:lnL w="6350" cap="flat" cmpd="sng" algn="ctr">
+                      <a:solidFill>
+                        <a:srgbClr val="E2E8F0"/>
+                      </a:solidFill>
+                      <a:prstDash val="solid"/>
+                      <a:round/>
+                      <a:headEnd type="none" w="med" len="med"/>
+                      <a:tailEnd type="none" w="med" len="med"/>
+                    </a:lnL>
+                    <a:lnR w="6350" cap="flat" cmpd="sng" algn="ctr">
+                      <a:solidFill>
+                        <a:srgbClr val="E2E8F0"/>
+                      </a:solidFill>
+                      <a:prstDash val="solid"/>
+                      <a:round/>
+                      <a:headEnd type="none" w="med" len="med"/>
+                      <a:tailEnd type="none" w="med" len="med"/>
+                    </a:lnR>
+                    <a:lnT w="6350" cap="flat" cmpd="sng" algn="ctr">
+                      <a:solidFill>
+                        <a:srgbClr val="E2E8F0"/>
+                      </a:solidFill>
+                      <a:prstDash val="solid"/>
+                      <a:round/>
+                      <a:headEnd type="none" w="med" len="med"/>
+                      <a:tailEnd type="none" w="med" len="med"/>
+                    </a:lnT>
+                    <a:lnB w="6350" cap="flat" cmpd="sng" algn="ctr">
+                      <a:solidFill>
+                        <a:srgbClr val="E2E8F0"/>
+                      </a:solidFill>
+                      <a:prstDash val="solid"/>
+                      <a:round/>
+                      <a:headEnd type="none" w="med" len="med"/>
+                      <a:tailEnd type="none" w="med" len="med"/>
+                    </a:lnB>
+                    <a:solidFill>
+                      <a:srgbClr val="64748B"/>
+                    </a:solidFill>
+                  </a:tcPr>
+                </a:tc>
+              </a:tr>
+              <a:tr h="411480">
+                <a:tc>
+                  <a:txBody>
+                    <a:bodyPr/>
+                    <a:lstStyle/>
+                    <a:p>
+                      <a:pPr indent="0" marL="0">
+                        <a:buNone/>
+                      </a:pPr>
+                      <a:r>
+                        <a:rPr lang="en-US" sz="900" dirty="0">
                           <a:solidFill>
                             <a:srgbClr val="1E293B"/>
                           </a:solidFill>
@@ -8720,16 +9252,37 @@
                           <a:ea typeface="Calibri" pitchFamily="34" charset="-122"/>
                           <a:cs typeface="Calibri" pitchFamily="34" charset="-120"/>
                         </a:rPr>
-                        <a:t>Adversarial scenarios</a:t>
+                        <a:t>Adversarial</a:t>
                       </a:r>
-                      <a:endParaRPr lang="en-US" sz="1200" dirty="0">
+                      <a:endParaRPr lang="en-US" sz="900" dirty="0">
+                        <a:latin typeface="Calibri" charset="0"/>
+                        <a:ea typeface="Calibri" charset="0"/>
+                        <a:cs typeface="Calibri" charset="0"/>
+                      </a:endParaRPr>
+                    </a:p>
+                    <a:p>
+                      <a:pPr indent="0" marL="0">
+                        <a:buNone/>
+                      </a:pPr>
+                      <a:r>
+                        <a:rPr lang="en-US" sz="900" dirty="0">
+                          <a:solidFill>
+                            <a:srgbClr val="1E293B"/>
+                          </a:solidFill>
+                          <a:latin typeface="Calibri" pitchFamily="34" charset="0"/>
+                          <a:ea typeface="Calibri" pitchFamily="34" charset="-122"/>
+                          <a:cs typeface="Calibri" pitchFamily="34" charset="-120"/>
+                        </a:rPr>
+                        <a:t>Red-Teaming</a:t>
+                      </a:r>
+                      <a:endParaRPr lang="en-US" sz="900" dirty="0">
                         <a:latin typeface="Calibri" charset="0"/>
                         <a:ea typeface="Calibri" charset="0"/>
                         <a:cs typeface="Calibri" charset="0"/>
                       </a:endParaRPr>
                     </a:p>
                   </a:txBody>
-                  <a:tcPr marL="91440" marR="91440" marT="45720" marB="45720">
+                  <a:tcPr marL="91440" marR="91440" marT="45720" marB="45720" anchor="ctr">
                     <a:lnL w="6350" cap="flat" cmpd="sng" algn="ctr">
                       <a:solidFill>
                         <a:srgbClr val="E2E8F0"/>
@@ -8780,7 +9333,7 @@
                         <a:buNone/>
                       </a:pPr>
                       <a:r>
-                        <a:rPr lang="en-US" sz="1200" b="1" dirty="0">
+                        <a:rPr lang="en-US" sz="900" b="1" dirty="0">
                           <a:solidFill>
                             <a:srgbClr val="1E293B"/>
                           </a:solidFill>
@@ -8790,14 +9343,35 @@
                         </a:rPr>
                         <a:t>149 built-in</a:t>
                       </a:r>
-                      <a:endParaRPr lang="en-US" sz="1200" dirty="0">
+                      <a:endParaRPr lang="en-US" sz="900" dirty="0">
+                        <a:latin typeface="Calibri" charset="0"/>
+                        <a:ea typeface="Calibri" charset="0"/>
+                        <a:cs typeface="Calibri" charset="0"/>
+                      </a:endParaRPr>
+                    </a:p>
+                    <a:p>
+                      <a:pPr indent="0" marL="0">
+                        <a:buNone/>
+                      </a:pPr>
+                      <a:r>
+                        <a:rPr lang="en-US" sz="900" b="1" dirty="0">
+                          <a:solidFill>
+                            <a:srgbClr val="1E293B"/>
+                          </a:solidFill>
+                          <a:latin typeface="Calibri" pitchFamily="34" charset="0"/>
+                          <a:ea typeface="Calibri" pitchFamily="34" charset="-122"/>
+                          <a:cs typeface="Calibri" pitchFamily="34" charset="-120"/>
+                        </a:rPr>
+                        <a:t>scenarios</a:t>
+                      </a:r>
+                      <a:endParaRPr lang="en-US" sz="900" dirty="0">
                         <a:latin typeface="Calibri" charset="0"/>
                         <a:ea typeface="Calibri" charset="0"/>
                         <a:cs typeface="Calibri" charset="0"/>
                       </a:endParaRPr>
                     </a:p>
                   </a:txBody>
-                  <a:tcPr marL="91440" marR="91440" marT="45720" marB="45720">
+                  <a:tcPr marL="91440" marR="91440" marT="45720" marB="45720" anchor="ctr">
                     <a:lnL w="6350" cap="flat" cmpd="sng" algn="ctr">
                       <a:solidFill>
                         <a:srgbClr val="E2E8F0"/>
@@ -8848,7 +9422,7 @@
                         <a:buNone/>
                       </a:pPr>
                       <a:r>
-                        <a:rPr lang="en-US" sz="1200" dirty="0">
+                        <a:rPr lang="en-US" sz="900" dirty="0">
                           <a:solidFill>
                             <a:srgbClr val="1E293B"/>
                           </a:solidFill>
@@ -8856,16 +9430,16 @@
                           <a:ea typeface="Calibri" pitchFamily="34" charset="-122"/>
                           <a:cs typeface="Calibri" pitchFamily="34" charset="-120"/>
                         </a:rPr>
-                        <a:t>Ad hoc</a:t>
+                        <a:t>Limited</a:t>
                       </a:r>
-                      <a:endParaRPr lang="en-US" sz="1200" dirty="0">
+                      <a:endParaRPr lang="en-US" sz="900" dirty="0">
                         <a:latin typeface="Calibri" charset="0"/>
                         <a:ea typeface="Calibri" charset="0"/>
                         <a:cs typeface="Calibri" charset="0"/>
                       </a:endParaRPr>
                     </a:p>
                   </a:txBody>
-                  <a:tcPr marL="91440" marR="91440" marT="45720" marB="45720">
+                  <a:tcPr marL="91440" marR="91440" marT="45720" marB="45720" anchor="ctr">
                     <a:lnL w="6350" cap="flat" cmpd="sng" algn="ctr">
                       <a:solidFill>
                         <a:srgbClr val="E2E8F0"/>
@@ -8916,7 +9490,7 @@
                         <a:buNone/>
                       </a:pPr>
                       <a:r>
-                        <a:rPr lang="en-US" sz="1200" dirty="0">
+                        <a:rPr lang="en-US" sz="900" dirty="0">
                           <a:solidFill>
                             <a:srgbClr val="1E293B"/>
                           </a:solidFill>
@@ -8924,69 +9498,20 @@
                           <a:ea typeface="Calibri" pitchFamily="34" charset="-122"/>
                           <a:cs typeface="Calibri" pitchFamily="34" charset="-120"/>
                         </a:rPr>
-                        <a:t>Limited</a:t>
+                        <a:t>Basic</a:t>
                       </a:r>
-                      <a:endParaRPr lang="en-US" sz="1200" dirty="0">
+                      <a:endParaRPr lang="en-US" sz="900" dirty="0">
                         <a:latin typeface="Calibri" charset="0"/>
                         <a:ea typeface="Calibri" charset="0"/>
                         <a:cs typeface="Calibri" charset="0"/>
                       </a:endParaRPr>
                     </a:p>
-                  </a:txBody>
-                  <a:tcPr marL="91440" marR="91440" marT="45720" marB="45720">
-                    <a:lnL w="6350" cap="flat" cmpd="sng" algn="ctr">
-                      <a:solidFill>
-                        <a:srgbClr val="E2E8F0"/>
-                      </a:solidFill>
-                      <a:prstDash val="solid"/>
-                      <a:round/>
-                      <a:headEnd type="none" w="med" len="med"/>
-                      <a:tailEnd type="none" w="med" len="med"/>
-                    </a:lnL>
-                    <a:lnR w="6350" cap="flat" cmpd="sng" algn="ctr">
-                      <a:solidFill>
-                        <a:srgbClr val="E2E8F0"/>
-                      </a:solidFill>
-                      <a:prstDash val="solid"/>
-                      <a:round/>
-                      <a:headEnd type="none" w="med" len="med"/>
-                      <a:tailEnd type="none" w="med" len="med"/>
-                    </a:lnR>
-                    <a:lnT w="6350" cap="flat" cmpd="sng" algn="ctr">
-                      <a:solidFill>
-                        <a:srgbClr val="E2E8F0"/>
-                      </a:solidFill>
-                      <a:prstDash val="solid"/>
-                      <a:round/>
-                      <a:headEnd type="none" w="med" len="med"/>
-                      <a:tailEnd type="none" w="med" len="med"/>
-                    </a:lnT>
-                    <a:lnB w="6350" cap="flat" cmpd="sng" algn="ctr">
-                      <a:solidFill>
-                        <a:srgbClr val="E2E8F0"/>
-                      </a:solidFill>
-                      <a:prstDash val="solid"/>
-                      <a:round/>
-                      <a:headEnd type="none" w="med" len="med"/>
-                      <a:tailEnd type="none" w="med" len="med"/>
-                    </a:lnB>
-                    <a:solidFill>
-                      <a:srgbClr val="FFFFFF"/>
-                    </a:solidFill>
-                  </a:tcPr>
-                </a:tc>
-              </a:tr>
-              <a:tr h="384048">
-                <a:tc>
-                  <a:txBody>
-                    <a:bodyPr/>
-                    <a:lstStyle/>
                     <a:p>
                       <a:pPr indent="0" marL="0">
                         <a:buNone/>
                       </a:pPr>
                       <a:r>
-                        <a:rPr lang="en-US" sz="1200" dirty="0">
+                        <a:rPr lang="en-US" sz="900" dirty="0">
                           <a:solidFill>
                             <a:srgbClr val="1E293B"/>
                           </a:solidFill>
@@ -8994,16 +9519,16 @@
                           <a:ea typeface="Calibri" pitchFamily="34" charset="-122"/>
                           <a:cs typeface="Calibri" pitchFamily="34" charset="-120"/>
                         </a:rPr>
-                        <a:t>AI agent focus</a:t>
+                        <a:t>guardrails</a:t>
                       </a:r>
-                      <a:endParaRPr lang="en-US" sz="1200" dirty="0">
+                      <a:endParaRPr lang="en-US" sz="900" dirty="0">
                         <a:latin typeface="Calibri" charset="0"/>
                         <a:ea typeface="Calibri" charset="0"/>
                         <a:cs typeface="Calibri" charset="0"/>
                       </a:endParaRPr>
                     </a:p>
                   </a:txBody>
-                  <a:tcPr marL="91440" marR="91440" marT="45720" marB="45720">
+                  <a:tcPr marL="91440" marR="91440" marT="45720" marB="45720" anchor="ctr">
                     <a:lnL w="6350" cap="flat" cmpd="sng" algn="ctr">
                       <a:solidFill>
                         <a:srgbClr val="E2E8F0"/>
@@ -9054,7 +9579,7 @@
                         <a:buNone/>
                       </a:pPr>
                       <a:r>
-                        <a:rPr lang="en-US" sz="1200" b="1" dirty="0">
+                        <a:rPr lang="en-US" sz="900" dirty="0">
                           <a:solidFill>
                             <a:srgbClr val="1E293B"/>
                           </a:solidFill>
@@ -9062,16 +9587,243 @@
                           <a:ea typeface="Calibri" pitchFamily="34" charset="-122"/>
                           <a:cs typeface="Calibri" pitchFamily="34" charset="-120"/>
                         </a:rPr>
-                        <a:t>Purpose-built</a:t>
+                        <a:t>None</a:t>
                       </a:r>
-                      <a:endParaRPr lang="en-US" sz="1200" dirty="0">
+                      <a:endParaRPr lang="en-US" sz="900" dirty="0">
                         <a:latin typeface="Calibri" charset="0"/>
                         <a:ea typeface="Calibri" charset="0"/>
                         <a:cs typeface="Calibri" charset="0"/>
                       </a:endParaRPr>
                     </a:p>
                   </a:txBody>
-                  <a:tcPr marL="91440" marR="91440" marT="45720" marB="45720">
+                  <a:tcPr marL="91440" marR="91440" marT="45720" marB="45720" anchor="ctr">
+                    <a:lnL w="6350" cap="flat" cmpd="sng" algn="ctr">
+                      <a:solidFill>
+                        <a:srgbClr val="E2E8F0"/>
+                      </a:solidFill>
+                      <a:prstDash val="solid"/>
+                      <a:round/>
+                      <a:headEnd type="none" w="med" len="med"/>
+                      <a:tailEnd type="none" w="med" len="med"/>
+                    </a:lnL>
+                    <a:lnR w="6350" cap="flat" cmpd="sng" algn="ctr">
+                      <a:solidFill>
+                        <a:srgbClr val="E2E8F0"/>
+                      </a:solidFill>
+                      <a:prstDash val="solid"/>
+                      <a:round/>
+                      <a:headEnd type="none" w="med" len="med"/>
+                      <a:tailEnd type="none" w="med" len="med"/>
+                    </a:lnR>
+                    <a:lnT w="6350" cap="flat" cmpd="sng" algn="ctr">
+                      <a:solidFill>
+                        <a:srgbClr val="E2E8F0"/>
+                      </a:solidFill>
+                      <a:prstDash val="solid"/>
+                      <a:round/>
+                      <a:headEnd type="none" w="med" len="med"/>
+                      <a:tailEnd type="none" w="med" len="med"/>
+                    </a:lnT>
+                    <a:lnB w="6350" cap="flat" cmpd="sng" algn="ctr">
+                      <a:solidFill>
+                        <a:srgbClr val="E2E8F0"/>
+                      </a:solidFill>
+                      <a:prstDash val="solid"/>
+                      <a:round/>
+                      <a:headEnd type="none" w="med" len="med"/>
+                      <a:tailEnd type="none" w="med" len="med"/>
+                    </a:lnB>
+                    <a:solidFill>
+                      <a:srgbClr val="FFFFFF"/>
+                    </a:solidFill>
+                  </a:tcPr>
+                </a:tc>
+                <a:tc>
+                  <a:txBody>
+                    <a:bodyPr/>
+                    <a:lstStyle/>
+                    <a:p>
+                      <a:pPr indent="0" marL="0">
+                        <a:buNone/>
+                      </a:pPr>
+                      <a:r>
+                        <a:rPr lang="en-US" sz="900" dirty="0">
+                          <a:solidFill>
+                            <a:srgbClr val="1E293B"/>
+                          </a:solidFill>
+                          <a:latin typeface="Calibri" pitchFamily="34" charset="0"/>
+                          <a:ea typeface="Calibri" pitchFamily="34" charset="-122"/>
+                          <a:cs typeface="Calibri" pitchFamily="34" charset="-120"/>
+                        </a:rPr>
+                        <a:t>None</a:t>
+                      </a:r>
+                      <a:endParaRPr lang="en-US" sz="900" dirty="0">
+                        <a:latin typeface="Calibri" charset="0"/>
+                        <a:ea typeface="Calibri" charset="0"/>
+                        <a:cs typeface="Calibri" charset="0"/>
+                      </a:endParaRPr>
+                    </a:p>
+                  </a:txBody>
+                  <a:tcPr marL="91440" marR="91440" marT="45720" marB="45720" anchor="ctr">
+                    <a:lnL w="6350" cap="flat" cmpd="sng" algn="ctr">
+                      <a:solidFill>
+                        <a:srgbClr val="E2E8F0"/>
+                      </a:solidFill>
+                      <a:prstDash val="solid"/>
+                      <a:round/>
+                      <a:headEnd type="none" w="med" len="med"/>
+                      <a:tailEnd type="none" w="med" len="med"/>
+                    </a:lnL>
+                    <a:lnR w="6350" cap="flat" cmpd="sng" algn="ctr">
+                      <a:solidFill>
+                        <a:srgbClr val="E2E8F0"/>
+                      </a:solidFill>
+                      <a:prstDash val="solid"/>
+                      <a:round/>
+                      <a:headEnd type="none" w="med" len="med"/>
+                      <a:tailEnd type="none" w="med" len="med"/>
+                    </a:lnR>
+                    <a:lnT w="6350" cap="flat" cmpd="sng" algn="ctr">
+                      <a:solidFill>
+                        <a:srgbClr val="E2E8F0"/>
+                      </a:solidFill>
+                      <a:prstDash val="solid"/>
+                      <a:round/>
+                      <a:headEnd type="none" w="med" len="med"/>
+                      <a:tailEnd type="none" w="med" len="med"/>
+                    </a:lnT>
+                    <a:lnB w="6350" cap="flat" cmpd="sng" algn="ctr">
+                      <a:solidFill>
+                        <a:srgbClr val="E2E8F0"/>
+                      </a:solidFill>
+                      <a:prstDash val="solid"/>
+                      <a:round/>
+                      <a:headEnd type="none" w="med" len="med"/>
+                      <a:tailEnd type="none" w="med" len="med"/>
+                    </a:lnB>
+                    <a:solidFill>
+                      <a:srgbClr val="FFFFFF"/>
+                    </a:solidFill>
+                  </a:tcPr>
+                </a:tc>
+              </a:tr>
+              <a:tr h="411480">
+                <a:tc>
+                  <a:txBody>
+                    <a:bodyPr/>
+                    <a:lstStyle/>
+                    <a:p>
+                      <a:pPr indent="0" marL="0">
+                        <a:buNone/>
+                      </a:pPr>
+                      <a:r>
+                        <a:rPr lang="en-US" sz="900" dirty="0">
+                          <a:solidFill>
+                            <a:srgbClr val="1E293B"/>
+                          </a:solidFill>
+                          <a:latin typeface="Calibri" pitchFamily="34" charset="0"/>
+                          <a:ea typeface="Calibri" pitchFamily="34" charset="-122"/>
+                          <a:cs typeface="Calibri" pitchFamily="34" charset="-120"/>
+                        </a:rPr>
+                        <a:t>Proactive</a:t>
+                      </a:r>
+                      <a:endParaRPr lang="en-US" sz="900" dirty="0">
+                        <a:latin typeface="Calibri" charset="0"/>
+                        <a:ea typeface="Calibri" charset="0"/>
+                        <a:cs typeface="Calibri" charset="0"/>
+                      </a:endParaRPr>
+                    </a:p>
+                    <a:p>
+                      <a:pPr indent="0" marL="0">
+                        <a:buNone/>
+                      </a:pPr>
+                      <a:r>
+                        <a:rPr lang="en-US" sz="900" dirty="0">
+                          <a:solidFill>
+                            <a:srgbClr val="1E293B"/>
+                          </a:solidFill>
+                          <a:latin typeface="Calibri" pitchFamily="34" charset="0"/>
+                          <a:ea typeface="Calibri" pitchFamily="34" charset="-122"/>
+                          <a:cs typeface="Calibri" pitchFamily="34" charset="-120"/>
+                        </a:rPr>
+                        <a:t>Attack Testing</a:t>
+                      </a:r>
+                      <a:endParaRPr lang="en-US" sz="900" dirty="0">
+                        <a:latin typeface="Calibri" charset="0"/>
+                        <a:ea typeface="Calibri" charset="0"/>
+                        <a:cs typeface="Calibri" charset="0"/>
+                      </a:endParaRPr>
+                    </a:p>
+                  </a:txBody>
+                  <a:tcPr marL="91440" marR="91440" marT="45720" marB="45720" anchor="ctr">
+                    <a:lnL w="6350" cap="flat" cmpd="sng" algn="ctr">
+                      <a:solidFill>
+                        <a:srgbClr val="E2E8F0"/>
+                      </a:solidFill>
+                      <a:prstDash val="solid"/>
+                      <a:round/>
+                      <a:headEnd type="none" w="med" len="med"/>
+                      <a:tailEnd type="none" w="med" len="med"/>
+                    </a:lnL>
+                    <a:lnR w="6350" cap="flat" cmpd="sng" algn="ctr">
+                      <a:solidFill>
+                        <a:srgbClr val="E2E8F0"/>
+                      </a:solidFill>
+                      <a:prstDash val="solid"/>
+                      <a:round/>
+                      <a:headEnd type="none" w="med" len="med"/>
+                      <a:tailEnd type="none" w="med" len="med"/>
+                    </a:lnR>
+                    <a:lnT w="6350" cap="flat" cmpd="sng" algn="ctr">
+                      <a:solidFill>
+                        <a:srgbClr val="E2E8F0"/>
+                      </a:solidFill>
+                      <a:prstDash val="solid"/>
+                      <a:round/>
+                      <a:headEnd type="none" w="med" len="med"/>
+                      <a:tailEnd type="none" w="med" len="med"/>
+                    </a:lnT>
+                    <a:lnB w="6350" cap="flat" cmpd="sng" algn="ctr">
+                      <a:solidFill>
+                        <a:srgbClr val="E2E8F0"/>
+                      </a:solidFill>
+                      <a:prstDash val="solid"/>
+                      <a:round/>
+                      <a:headEnd type="none" w="med" len="med"/>
+                      <a:tailEnd type="none" w="med" len="med"/>
+                    </a:lnB>
+                    <a:solidFill>
+                      <a:srgbClr val="FFFFFF"/>
+                    </a:solidFill>
+                  </a:tcPr>
+                </a:tc>
+                <a:tc>
+                  <a:txBody>
+                    <a:bodyPr/>
+                    <a:lstStyle/>
+                    <a:p>
+                      <a:pPr indent="0" marL="0">
+                        <a:buNone/>
+                      </a:pPr>
+                      <a:r>
+                        <a:rPr lang="en-US" sz="900" b="1" dirty="0">
+                          <a:solidFill>
+                            <a:srgbClr val="1E293B"/>
+                          </a:solidFill>
+                          <a:latin typeface="Calibri" pitchFamily="34" charset="0"/>
+                          <a:ea typeface="Calibri" pitchFamily="34" charset="-122"/>
+                          <a:cs typeface="Calibri" pitchFamily="34" charset="-120"/>
+                        </a:rPr>
+                        <a:t>✓ Core focus</a:t>
+                      </a:r>
+                      <a:endParaRPr lang="en-US" sz="900" dirty="0">
+                        <a:latin typeface="Calibri" charset="0"/>
+                        <a:ea typeface="Calibri" charset="0"/>
+                        <a:cs typeface="Calibri" charset="0"/>
+                      </a:endParaRPr>
+                    </a:p>
+                  </a:txBody>
+                  <a:tcPr marL="91440" marR="91440" marT="45720" marB="45720" anchor="ctr">
                     <a:lnL w="6350" cap="flat" cmpd="sng" algn="ctr">
                       <a:solidFill>
                         <a:srgbClr val="E2E8F0"/>
@@ -9122,7 +9874,7 @@
                         <a:buNone/>
                       </a:pPr>
                       <a:r>
-                        <a:rPr lang="en-US" sz="1200" dirty="0">
+                        <a:rPr lang="en-US" sz="900" dirty="0">
                           <a:solidFill>
                             <a:srgbClr val="1E293B"/>
                           </a:solidFill>
@@ -9130,16 +9882,37 @@
                           <a:ea typeface="Calibri" pitchFamily="34" charset="-122"/>
                           <a:cs typeface="Calibri" pitchFamily="34" charset="-120"/>
                         </a:rPr>
-                        <a:t>Manual scripts</a:t>
+                        <a:t>Simulation</a:t>
                       </a:r>
-                      <a:endParaRPr lang="en-US" sz="1200" dirty="0">
+                      <a:endParaRPr lang="en-US" sz="900" dirty="0">
+                        <a:latin typeface="Calibri" charset="0"/>
+                        <a:ea typeface="Calibri" charset="0"/>
+                        <a:cs typeface="Calibri" charset="0"/>
+                      </a:endParaRPr>
+                    </a:p>
+                    <a:p>
+                      <a:pPr indent="0" marL="0">
+                        <a:buNone/>
+                      </a:pPr>
+                      <a:r>
+                        <a:rPr lang="en-US" sz="900" dirty="0">
+                          <a:solidFill>
+                            <a:srgbClr val="1E293B"/>
+                          </a:solidFill>
+                          <a:latin typeface="Calibri" pitchFamily="34" charset="0"/>
+                          <a:ea typeface="Calibri" pitchFamily="34" charset="-122"/>
+                          <a:cs typeface="Calibri" pitchFamily="34" charset="-120"/>
+                        </a:rPr>
+                        <a:t>only</a:t>
+                      </a:r>
+                      <a:endParaRPr lang="en-US" sz="900" dirty="0">
                         <a:latin typeface="Calibri" charset="0"/>
                         <a:ea typeface="Calibri" charset="0"/>
                         <a:cs typeface="Calibri" charset="0"/>
                       </a:endParaRPr>
                     </a:p>
                   </a:txBody>
-                  <a:tcPr marL="91440" marR="91440" marT="45720" marB="45720">
+                  <a:tcPr marL="91440" marR="91440" marT="45720" marB="45720" anchor="ctr">
                     <a:lnL w="6350" cap="flat" cmpd="sng" algn="ctr">
                       <a:solidFill>
                         <a:srgbClr val="E2E8F0"/>
@@ -9190,7 +9963,7 @@
                         <a:buNone/>
                       </a:pPr>
                       <a:r>
-                        <a:rPr lang="en-US" sz="1200" dirty="0">
+                        <a:rPr lang="en-US" sz="900" dirty="0">
                           <a:solidFill>
                             <a:srgbClr val="1E293B"/>
                           </a:solidFill>
@@ -9198,86 +9971,16 @@
                           <a:ea typeface="Calibri" pitchFamily="34" charset="-122"/>
                           <a:cs typeface="Calibri" pitchFamily="34" charset="-120"/>
                         </a:rPr>
-                        <a:t>Generic prompts</a:t>
+                        <a:t>✗</a:t>
                       </a:r>
-                      <a:endParaRPr lang="en-US" sz="1200" dirty="0">
+                      <a:endParaRPr lang="en-US" sz="900" dirty="0">
                         <a:latin typeface="Calibri" charset="0"/>
                         <a:ea typeface="Calibri" charset="0"/>
                         <a:cs typeface="Calibri" charset="0"/>
                       </a:endParaRPr>
                     </a:p>
                   </a:txBody>
-                  <a:tcPr marL="91440" marR="91440" marT="45720" marB="45720">
-                    <a:lnL w="6350" cap="flat" cmpd="sng" algn="ctr">
-                      <a:solidFill>
-                        <a:srgbClr val="E2E8F0"/>
-                      </a:solidFill>
-                      <a:prstDash val="solid"/>
-                      <a:round/>
-                      <a:headEnd type="none" w="med" len="med"/>
-                      <a:tailEnd type="none" w="med" len="med"/>
-                    </a:lnL>
-                    <a:lnR w="6350" cap="flat" cmpd="sng" algn="ctr">
-                      <a:solidFill>
-                        <a:srgbClr val="E2E8F0"/>
-                      </a:solidFill>
-                      <a:prstDash val="solid"/>
-                      <a:round/>
-                      <a:headEnd type="none" w="med" len="med"/>
-                      <a:tailEnd type="none" w="med" len="med"/>
-                    </a:lnR>
-                    <a:lnT w="6350" cap="flat" cmpd="sng" algn="ctr">
-                      <a:solidFill>
-                        <a:srgbClr val="E2E8F0"/>
-                      </a:solidFill>
-                      <a:prstDash val="solid"/>
-                      <a:round/>
-                      <a:headEnd type="none" w="med" len="med"/>
-                      <a:tailEnd type="none" w="med" len="med"/>
-                    </a:lnT>
-                    <a:lnB w="6350" cap="flat" cmpd="sng" algn="ctr">
-                      <a:solidFill>
-                        <a:srgbClr val="E2E8F0"/>
-                      </a:solidFill>
-                      <a:prstDash val="solid"/>
-                      <a:round/>
-                      <a:headEnd type="none" w="med" len="med"/>
-                      <a:tailEnd type="none" w="med" len="med"/>
-                    </a:lnB>
-                    <a:solidFill>
-                      <a:srgbClr val="FFFFFF"/>
-                    </a:solidFill>
-                  </a:tcPr>
-                </a:tc>
-              </a:tr>
-              <a:tr h="384048">
-                <a:tc>
-                  <a:txBody>
-                    <a:bodyPr/>
-                    <a:lstStyle/>
-                    <a:p>
-                      <a:pPr indent="0" marL="0">
-                        <a:buNone/>
-                      </a:pPr>
-                      <a:r>
-                        <a:rPr lang="en-US" sz="1200" dirty="0">
-                          <a:solidFill>
-                            <a:srgbClr val="1E293B"/>
-                          </a:solidFill>
-                          <a:latin typeface="Calibri" pitchFamily="34" charset="0"/>
-                          <a:ea typeface="Calibri" pitchFamily="34" charset="-122"/>
-                          <a:cs typeface="Calibri" pitchFamily="34" charset="-120"/>
-                        </a:rPr>
-                        <a:t>Automated scoring</a:t>
-                      </a:r>
-                      <a:endParaRPr lang="en-US" sz="1200" dirty="0">
-                        <a:latin typeface="Calibri" charset="0"/>
-                        <a:ea typeface="Calibri" charset="0"/>
-                        <a:cs typeface="Calibri" charset="0"/>
-                      </a:endParaRPr>
-                    </a:p>
-                  </a:txBody>
-                  <a:tcPr marL="91440" marR="91440" marT="45720" marB="45720">
+                  <a:tcPr marL="91440" marR="91440" marT="45720" marB="45720" anchor="ctr">
                     <a:lnL w="6350" cap="flat" cmpd="sng" algn="ctr">
                       <a:solidFill>
                         <a:srgbClr val="E2E8F0"/>
@@ -9328,7 +10031,7 @@
                         <a:buNone/>
                       </a:pPr>
                       <a:r>
-                        <a:rPr lang="en-US" sz="1200" b="1" dirty="0">
+                        <a:rPr lang="en-US" sz="900" dirty="0">
                           <a:solidFill>
                             <a:srgbClr val="1E293B"/>
                           </a:solidFill>
@@ -9336,16 +10039,264 @@
                           <a:ea typeface="Calibri" pitchFamily="34" charset="-122"/>
                           <a:cs typeface="Calibri" pitchFamily="34" charset="-120"/>
                         </a:rPr>
-                        <a:t>AI-powered</a:t>
+                        <a:t>✗</a:t>
                       </a:r>
-                      <a:endParaRPr lang="en-US" sz="1200" dirty="0">
+                      <a:endParaRPr lang="en-US" sz="900" dirty="0">
                         <a:latin typeface="Calibri" charset="0"/>
                         <a:ea typeface="Calibri" charset="0"/>
                         <a:cs typeface="Calibri" charset="0"/>
                       </a:endParaRPr>
                     </a:p>
                   </a:txBody>
-                  <a:tcPr marL="91440" marR="91440" marT="45720" marB="45720">
+                  <a:tcPr marL="91440" marR="91440" marT="45720" marB="45720" anchor="ctr">
+                    <a:lnL w="6350" cap="flat" cmpd="sng" algn="ctr">
+                      <a:solidFill>
+                        <a:srgbClr val="E2E8F0"/>
+                      </a:solidFill>
+                      <a:prstDash val="solid"/>
+                      <a:round/>
+                      <a:headEnd type="none" w="med" len="med"/>
+                      <a:tailEnd type="none" w="med" len="med"/>
+                    </a:lnL>
+                    <a:lnR w="6350" cap="flat" cmpd="sng" algn="ctr">
+                      <a:solidFill>
+                        <a:srgbClr val="E2E8F0"/>
+                      </a:solidFill>
+                      <a:prstDash val="solid"/>
+                      <a:round/>
+                      <a:headEnd type="none" w="med" len="med"/>
+                      <a:tailEnd type="none" w="med" len="med"/>
+                    </a:lnR>
+                    <a:lnT w="6350" cap="flat" cmpd="sng" algn="ctr">
+                      <a:solidFill>
+                        <a:srgbClr val="E2E8F0"/>
+                      </a:solidFill>
+                      <a:prstDash val="solid"/>
+                      <a:round/>
+                      <a:headEnd type="none" w="med" len="med"/>
+                      <a:tailEnd type="none" w="med" len="med"/>
+                    </a:lnT>
+                    <a:lnB w="6350" cap="flat" cmpd="sng" algn="ctr">
+                      <a:solidFill>
+                        <a:srgbClr val="E2E8F0"/>
+                      </a:solidFill>
+                      <a:prstDash val="solid"/>
+                      <a:round/>
+                      <a:headEnd type="none" w="med" len="med"/>
+                      <a:tailEnd type="none" w="med" len="med"/>
+                    </a:lnB>
+                    <a:solidFill>
+                      <a:srgbClr val="FFFFFF"/>
+                    </a:solidFill>
+                  </a:tcPr>
+                </a:tc>
+                <a:tc>
+                  <a:txBody>
+                    <a:bodyPr/>
+                    <a:lstStyle/>
+                    <a:p>
+                      <a:pPr indent="0" marL="0">
+                        <a:buNone/>
+                      </a:pPr>
+                      <a:r>
+                        <a:rPr lang="en-US" sz="900" dirty="0">
+                          <a:solidFill>
+                            <a:srgbClr val="1E293B"/>
+                          </a:solidFill>
+                          <a:latin typeface="Calibri" pitchFamily="34" charset="0"/>
+                          <a:ea typeface="Calibri" pitchFamily="34" charset="-122"/>
+                          <a:cs typeface="Calibri" pitchFamily="34" charset="-120"/>
+                        </a:rPr>
+                        <a:t>✗</a:t>
+                      </a:r>
+                      <a:endParaRPr lang="en-US" sz="900" dirty="0">
+                        <a:latin typeface="Calibri" charset="0"/>
+                        <a:ea typeface="Calibri" charset="0"/>
+                        <a:cs typeface="Calibri" charset="0"/>
+                      </a:endParaRPr>
+                    </a:p>
+                  </a:txBody>
+                  <a:tcPr marL="91440" marR="91440" marT="45720" marB="45720" anchor="ctr">
+                    <a:lnL w="6350" cap="flat" cmpd="sng" algn="ctr">
+                      <a:solidFill>
+                        <a:srgbClr val="E2E8F0"/>
+                      </a:solidFill>
+                      <a:prstDash val="solid"/>
+                      <a:round/>
+                      <a:headEnd type="none" w="med" len="med"/>
+                      <a:tailEnd type="none" w="med" len="med"/>
+                    </a:lnL>
+                    <a:lnR w="6350" cap="flat" cmpd="sng" algn="ctr">
+                      <a:solidFill>
+                        <a:srgbClr val="E2E8F0"/>
+                      </a:solidFill>
+                      <a:prstDash val="solid"/>
+                      <a:round/>
+                      <a:headEnd type="none" w="med" len="med"/>
+                      <a:tailEnd type="none" w="med" len="med"/>
+                    </a:lnR>
+                    <a:lnT w="6350" cap="flat" cmpd="sng" algn="ctr">
+                      <a:solidFill>
+                        <a:srgbClr val="E2E8F0"/>
+                      </a:solidFill>
+                      <a:prstDash val="solid"/>
+                      <a:round/>
+                      <a:headEnd type="none" w="med" len="med"/>
+                      <a:tailEnd type="none" w="med" len="med"/>
+                    </a:lnT>
+                    <a:lnB w="6350" cap="flat" cmpd="sng" algn="ctr">
+                      <a:solidFill>
+                        <a:srgbClr val="E2E8F0"/>
+                      </a:solidFill>
+                      <a:prstDash val="solid"/>
+                      <a:round/>
+                      <a:headEnd type="none" w="med" len="med"/>
+                      <a:tailEnd type="none" w="med" len="med"/>
+                    </a:lnB>
+                    <a:solidFill>
+                      <a:srgbClr val="FFFFFF"/>
+                    </a:solidFill>
+                  </a:tcPr>
+                </a:tc>
+              </a:tr>
+              <a:tr h="411480">
+                <a:tc>
+                  <a:txBody>
+                    <a:bodyPr/>
+                    <a:lstStyle/>
+                    <a:p>
+                      <a:pPr indent="0" marL="0">
+                        <a:buNone/>
+                      </a:pPr>
+                      <a:r>
+                        <a:rPr lang="en-US" sz="900" dirty="0">
+                          <a:solidFill>
+                            <a:srgbClr val="1E293B"/>
+                          </a:solidFill>
+                          <a:latin typeface="Calibri" pitchFamily="34" charset="0"/>
+                          <a:ea typeface="Calibri" pitchFamily="34" charset="-122"/>
+                          <a:cs typeface="Calibri" pitchFamily="34" charset="-120"/>
+                        </a:rPr>
+                        <a:t>Model Risk</a:t>
+                      </a:r>
+                      <a:endParaRPr lang="en-US" sz="900" dirty="0">
+                        <a:latin typeface="Calibri" charset="0"/>
+                        <a:ea typeface="Calibri" charset="0"/>
+                        <a:cs typeface="Calibri" charset="0"/>
+                      </a:endParaRPr>
+                    </a:p>
+                    <a:p>
+                      <a:pPr indent="0" marL="0">
+                        <a:buNone/>
+                      </a:pPr>
+                      <a:r>
+                        <a:rPr lang="en-US" sz="900" dirty="0">
+                          <a:solidFill>
+                            <a:srgbClr val="1E293B"/>
+                          </a:solidFill>
+                          <a:latin typeface="Calibri" pitchFamily="34" charset="0"/>
+                          <a:ea typeface="Calibri" pitchFamily="34" charset="-122"/>
+                          <a:cs typeface="Calibri" pitchFamily="34" charset="-120"/>
+                        </a:rPr>
+                        <a:t>Validation</a:t>
+                      </a:r>
+                      <a:endParaRPr lang="en-US" sz="900" dirty="0">
+                        <a:latin typeface="Calibri" charset="0"/>
+                        <a:ea typeface="Calibri" charset="0"/>
+                        <a:cs typeface="Calibri" charset="0"/>
+                      </a:endParaRPr>
+                    </a:p>
+                  </a:txBody>
+                  <a:tcPr marL="91440" marR="91440" marT="45720" marB="45720" anchor="ctr">
+                    <a:lnL w="6350" cap="flat" cmpd="sng" algn="ctr">
+                      <a:solidFill>
+                        <a:srgbClr val="E2E8F0"/>
+                      </a:solidFill>
+                      <a:prstDash val="solid"/>
+                      <a:round/>
+                      <a:headEnd type="none" w="med" len="med"/>
+                      <a:tailEnd type="none" w="med" len="med"/>
+                    </a:lnL>
+                    <a:lnR w="6350" cap="flat" cmpd="sng" algn="ctr">
+                      <a:solidFill>
+                        <a:srgbClr val="E2E8F0"/>
+                      </a:solidFill>
+                      <a:prstDash val="solid"/>
+                      <a:round/>
+                      <a:headEnd type="none" w="med" len="med"/>
+                      <a:tailEnd type="none" w="med" len="med"/>
+                    </a:lnR>
+                    <a:lnT w="6350" cap="flat" cmpd="sng" algn="ctr">
+                      <a:solidFill>
+                        <a:srgbClr val="E2E8F0"/>
+                      </a:solidFill>
+                      <a:prstDash val="solid"/>
+                      <a:round/>
+                      <a:headEnd type="none" w="med" len="med"/>
+                      <a:tailEnd type="none" w="med" len="med"/>
+                    </a:lnT>
+                    <a:lnB w="6350" cap="flat" cmpd="sng" algn="ctr">
+                      <a:solidFill>
+                        <a:srgbClr val="E2E8F0"/>
+                      </a:solidFill>
+                      <a:prstDash val="solid"/>
+                      <a:round/>
+                      <a:headEnd type="none" w="med" len="med"/>
+                      <a:tailEnd type="none" w="med" len="med"/>
+                    </a:lnB>
+                    <a:solidFill>
+                      <a:srgbClr val="FFFFFF"/>
+                    </a:solidFill>
+                  </a:tcPr>
+                </a:tc>
+                <a:tc>
+                  <a:txBody>
+                    <a:bodyPr/>
+                    <a:lstStyle/>
+                    <a:p>
+                      <a:pPr indent="0" marL="0">
+                        <a:buNone/>
+                      </a:pPr>
+                      <a:r>
+                        <a:rPr lang="en-US" sz="900" b="1" dirty="0">
+                          <a:solidFill>
+                            <a:srgbClr val="1E293B"/>
+                          </a:solidFill>
+                          <a:latin typeface="Calibri" pitchFamily="34" charset="0"/>
+                          <a:ea typeface="Calibri" pitchFamily="34" charset="-122"/>
+                          <a:cs typeface="Calibri" pitchFamily="34" charset="-120"/>
+                        </a:rPr>
+                        <a:t>Quantitative</a:t>
+                      </a:r>
+                      <a:endParaRPr lang="en-US" sz="900" dirty="0">
+                        <a:latin typeface="Calibri" charset="0"/>
+                        <a:ea typeface="Calibri" charset="0"/>
+                        <a:cs typeface="Calibri" charset="0"/>
+                      </a:endParaRPr>
+                    </a:p>
+                    <a:p>
+                      <a:pPr indent="0" marL="0">
+                        <a:buNone/>
+                      </a:pPr>
+                      <a:r>
+                        <a:rPr lang="en-US" sz="900" b="1" dirty="0">
+                          <a:solidFill>
+                            <a:srgbClr val="1E293B"/>
+                          </a:solidFill>
+                          <a:latin typeface="Calibri" pitchFamily="34" charset="0"/>
+                          <a:ea typeface="Calibri" pitchFamily="34" charset="-122"/>
+                          <a:cs typeface="Calibri" pitchFamily="34" charset="-120"/>
+                        </a:rPr>
+                        <a:t>+ Qualitative</a:t>
+                      </a:r>
+                      <a:endParaRPr lang="en-US" sz="900" dirty="0">
+                        <a:latin typeface="Calibri" charset="0"/>
+                        <a:ea typeface="Calibri" charset="0"/>
+                        <a:cs typeface="Calibri" charset="0"/>
+                      </a:endParaRPr>
+                    </a:p>
+                  </a:txBody>
+                  <a:tcPr marL="91440" marR="91440" marT="45720" marB="45720" anchor="ctr">
                     <a:lnL w="6350" cap="flat" cmpd="sng" algn="ctr">
                       <a:solidFill>
                         <a:srgbClr val="E2E8F0"/>
@@ -9396,7 +10347,7 @@
                         <a:buNone/>
                       </a:pPr>
                       <a:r>
-                        <a:rPr lang="en-US" sz="1200" dirty="0">
+                        <a:rPr lang="en-US" sz="900" dirty="0">
                           <a:solidFill>
                             <a:srgbClr val="1E293B"/>
                           </a:solidFill>
@@ -9404,16 +10355,16 @@
                           <a:ea typeface="Calibri" pitchFamily="34" charset="-122"/>
                           <a:cs typeface="Calibri" pitchFamily="34" charset="-120"/>
                         </a:rPr>
-                        <a:t>Human review</a:t>
+                        <a:t>✗</a:t>
                       </a:r>
-                      <a:endParaRPr lang="en-US" sz="1200" dirty="0">
+                      <a:endParaRPr lang="en-US" sz="900" dirty="0">
                         <a:latin typeface="Calibri" charset="0"/>
                         <a:ea typeface="Calibri" charset="0"/>
                         <a:cs typeface="Calibri" charset="0"/>
                       </a:endParaRPr>
                     </a:p>
                   </a:txBody>
-                  <a:tcPr marL="91440" marR="91440" marT="45720" marB="45720">
+                  <a:tcPr marL="91440" marR="91440" marT="45720" marB="45720" anchor="ctr">
                     <a:lnL w="6350" cap="flat" cmpd="sng" algn="ctr">
                       <a:solidFill>
                         <a:srgbClr val="E2E8F0"/>
@@ -9464,7 +10415,7 @@
                         <a:buNone/>
                       </a:pPr>
                       <a:r>
-                        <a:rPr lang="en-US" sz="1200" dirty="0">
+                        <a:rPr lang="en-US" sz="900" dirty="0">
                           <a:solidFill>
                             <a:srgbClr val="1E293B"/>
                           </a:solidFill>
@@ -9472,86 +10423,16 @@
                           <a:ea typeface="Calibri" pitchFamily="34" charset="-122"/>
                           <a:cs typeface="Calibri" pitchFamily="34" charset="-120"/>
                         </a:rPr>
-                        <a:t>Basic metrics</a:t>
+                        <a:t>Partial</a:t>
                       </a:r>
-                      <a:endParaRPr lang="en-US" sz="1200" dirty="0">
+                      <a:endParaRPr lang="en-US" sz="900" dirty="0">
                         <a:latin typeface="Calibri" charset="0"/>
                         <a:ea typeface="Calibri" charset="0"/>
                         <a:cs typeface="Calibri" charset="0"/>
                       </a:endParaRPr>
                     </a:p>
                   </a:txBody>
-                  <a:tcPr marL="91440" marR="91440" marT="45720" marB="45720">
-                    <a:lnL w="6350" cap="flat" cmpd="sng" algn="ctr">
-                      <a:solidFill>
-                        <a:srgbClr val="E2E8F0"/>
-                      </a:solidFill>
-                      <a:prstDash val="solid"/>
-                      <a:round/>
-                      <a:headEnd type="none" w="med" len="med"/>
-                      <a:tailEnd type="none" w="med" len="med"/>
-                    </a:lnL>
-                    <a:lnR w="6350" cap="flat" cmpd="sng" algn="ctr">
-                      <a:solidFill>
-                        <a:srgbClr val="E2E8F0"/>
-                      </a:solidFill>
-                      <a:prstDash val="solid"/>
-                      <a:round/>
-                      <a:headEnd type="none" w="med" len="med"/>
-                      <a:tailEnd type="none" w="med" len="med"/>
-                    </a:lnR>
-                    <a:lnT w="6350" cap="flat" cmpd="sng" algn="ctr">
-                      <a:solidFill>
-                        <a:srgbClr val="E2E8F0"/>
-                      </a:solidFill>
-                      <a:prstDash val="solid"/>
-                      <a:round/>
-                      <a:headEnd type="none" w="med" len="med"/>
-                      <a:tailEnd type="none" w="med" len="med"/>
-                    </a:lnT>
-                    <a:lnB w="6350" cap="flat" cmpd="sng" algn="ctr">
-                      <a:solidFill>
-                        <a:srgbClr val="E2E8F0"/>
-                      </a:solidFill>
-                      <a:prstDash val="solid"/>
-                      <a:round/>
-                      <a:headEnd type="none" w="med" len="med"/>
-                      <a:tailEnd type="none" w="med" len="med"/>
-                    </a:lnB>
-                    <a:solidFill>
-                      <a:srgbClr val="FFFFFF"/>
-                    </a:solidFill>
-                  </a:tcPr>
-                </a:tc>
-              </a:tr>
-              <a:tr h="384048">
-                <a:tc>
-                  <a:txBody>
-                    <a:bodyPr/>
-                    <a:lstStyle/>
-                    <a:p>
-                      <a:pPr indent="0" marL="0">
-                        <a:buNone/>
-                      </a:pPr>
-                      <a:r>
-                        <a:rPr lang="en-US" sz="1200" dirty="0">
-                          <a:solidFill>
-                            <a:srgbClr val="1E293B"/>
-                          </a:solidFill>
-                          <a:latin typeface="Calibri" pitchFamily="34" charset="0"/>
-                          <a:ea typeface="Calibri" pitchFamily="34" charset="-122"/>
-                          <a:cs typeface="Calibri" pitchFamily="34" charset="-120"/>
-                        </a:rPr>
-                        <a:t>Multi-model support</a:t>
-                      </a:r>
-                      <a:endParaRPr lang="en-US" sz="1200" dirty="0">
-                        <a:latin typeface="Calibri" charset="0"/>
-                        <a:ea typeface="Calibri" charset="0"/>
-                        <a:cs typeface="Calibri" charset="0"/>
-                      </a:endParaRPr>
-                    </a:p>
-                  </a:txBody>
-                  <a:tcPr marL="91440" marR="91440" marT="45720" marB="45720">
+                  <a:tcPr marL="91440" marR="91440" marT="45720" marB="45720" anchor="ctr">
                     <a:lnL w="6350" cap="flat" cmpd="sng" algn="ctr">
                       <a:solidFill>
                         <a:srgbClr val="E2E8F0"/>
@@ -9602,7 +10483,7 @@
                         <a:buNone/>
                       </a:pPr>
                       <a:r>
-                        <a:rPr lang="en-US" sz="1200" b="1" dirty="0">
+                        <a:rPr lang="en-US" sz="900" dirty="0">
                           <a:solidFill>
                             <a:srgbClr val="1E293B"/>
                           </a:solidFill>
@@ -9610,16 +10491,264 @@
                           <a:ea typeface="Calibri" pitchFamily="34" charset="-122"/>
                           <a:cs typeface="Calibri" pitchFamily="34" charset="-120"/>
                         </a:rPr>
-                        <a:t>20+ models</a:t>
+                        <a:t>✗</a:t>
                       </a:r>
-                      <a:endParaRPr lang="en-US" sz="1200" dirty="0">
+                      <a:endParaRPr lang="en-US" sz="900" dirty="0">
                         <a:latin typeface="Calibri" charset="0"/>
                         <a:ea typeface="Calibri" charset="0"/>
                         <a:cs typeface="Calibri" charset="0"/>
                       </a:endParaRPr>
                     </a:p>
                   </a:txBody>
-                  <a:tcPr marL="91440" marR="91440" marT="45720" marB="45720">
+                  <a:tcPr marL="91440" marR="91440" marT="45720" marB="45720" anchor="ctr">
+                    <a:lnL w="6350" cap="flat" cmpd="sng" algn="ctr">
+                      <a:solidFill>
+                        <a:srgbClr val="E2E8F0"/>
+                      </a:solidFill>
+                      <a:prstDash val="solid"/>
+                      <a:round/>
+                      <a:headEnd type="none" w="med" len="med"/>
+                      <a:tailEnd type="none" w="med" len="med"/>
+                    </a:lnL>
+                    <a:lnR w="6350" cap="flat" cmpd="sng" algn="ctr">
+                      <a:solidFill>
+                        <a:srgbClr val="E2E8F0"/>
+                      </a:solidFill>
+                      <a:prstDash val="solid"/>
+                      <a:round/>
+                      <a:headEnd type="none" w="med" len="med"/>
+                      <a:tailEnd type="none" w="med" len="med"/>
+                    </a:lnR>
+                    <a:lnT w="6350" cap="flat" cmpd="sng" algn="ctr">
+                      <a:solidFill>
+                        <a:srgbClr val="E2E8F0"/>
+                      </a:solidFill>
+                      <a:prstDash val="solid"/>
+                      <a:round/>
+                      <a:headEnd type="none" w="med" len="med"/>
+                      <a:tailEnd type="none" w="med" len="med"/>
+                    </a:lnT>
+                    <a:lnB w="6350" cap="flat" cmpd="sng" algn="ctr">
+                      <a:solidFill>
+                        <a:srgbClr val="E2E8F0"/>
+                      </a:solidFill>
+                      <a:prstDash val="solid"/>
+                      <a:round/>
+                      <a:headEnd type="none" w="med" len="med"/>
+                      <a:tailEnd type="none" w="med" len="med"/>
+                    </a:lnB>
+                    <a:solidFill>
+                      <a:srgbClr val="FFFFFF"/>
+                    </a:solidFill>
+                  </a:tcPr>
+                </a:tc>
+                <a:tc>
+                  <a:txBody>
+                    <a:bodyPr/>
+                    <a:lstStyle/>
+                    <a:p>
+                      <a:pPr indent="0" marL="0">
+                        <a:buNone/>
+                      </a:pPr>
+                      <a:r>
+                        <a:rPr lang="en-US" sz="900" dirty="0">
+                          <a:solidFill>
+                            <a:srgbClr val="1E293B"/>
+                          </a:solidFill>
+                          <a:latin typeface="Calibri" pitchFamily="34" charset="0"/>
+                          <a:ea typeface="Calibri" pitchFamily="34" charset="-122"/>
+                          <a:cs typeface="Calibri" pitchFamily="34" charset="-120"/>
+                        </a:rPr>
+                        <a:t>Drift only</a:t>
+                      </a:r>
+                      <a:endParaRPr lang="en-US" sz="900" dirty="0">
+                        <a:latin typeface="Calibri" charset="0"/>
+                        <a:ea typeface="Calibri" charset="0"/>
+                        <a:cs typeface="Calibri" charset="0"/>
+                      </a:endParaRPr>
+                    </a:p>
+                  </a:txBody>
+                  <a:tcPr marL="91440" marR="91440" marT="45720" marB="45720" anchor="ctr">
+                    <a:lnL w="6350" cap="flat" cmpd="sng" algn="ctr">
+                      <a:solidFill>
+                        <a:srgbClr val="E2E8F0"/>
+                      </a:solidFill>
+                      <a:prstDash val="solid"/>
+                      <a:round/>
+                      <a:headEnd type="none" w="med" len="med"/>
+                      <a:tailEnd type="none" w="med" len="med"/>
+                    </a:lnL>
+                    <a:lnR w="6350" cap="flat" cmpd="sng" algn="ctr">
+                      <a:solidFill>
+                        <a:srgbClr val="E2E8F0"/>
+                      </a:solidFill>
+                      <a:prstDash val="solid"/>
+                      <a:round/>
+                      <a:headEnd type="none" w="med" len="med"/>
+                      <a:tailEnd type="none" w="med" len="med"/>
+                    </a:lnR>
+                    <a:lnT w="6350" cap="flat" cmpd="sng" algn="ctr">
+                      <a:solidFill>
+                        <a:srgbClr val="E2E8F0"/>
+                      </a:solidFill>
+                      <a:prstDash val="solid"/>
+                      <a:round/>
+                      <a:headEnd type="none" w="med" len="med"/>
+                      <a:tailEnd type="none" w="med" len="med"/>
+                    </a:lnT>
+                    <a:lnB w="6350" cap="flat" cmpd="sng" algn="ctr">
+                      <a:solidFill>
+                        <a:srgbClr val="E2E8F0"/>
+                      </a:solidFill>
+                      <a:prstDash val="solid"/>
+                      <a:round/>
+                      <a:headEnd type="none" w="med" len="med"/>
+                      <a:tailEnd type="none" w="med" len="med"/>
+                    </a:lnB>
+                    <a:solidFill>
+                      <a:srgbClr val="FFFFFF"/>
+                    </a:solidFill>
+                  </a:tcPr>
+                </a:tc>
+              </a:tr>
+              <a:tr h="411480">
+                <a:tc>
+                  <a:txBody>
+                    <a:bodyPr/>
+                    <a:lstStyle/>
+                    <a:p>
+                      <a:pPr indent="0" marL="0">
+                        <a:buNone/>
+                      </a:pPr>
+                      <a:r>
+                        <a:rPr lang="en-US" sz="900" dirty="0">
+                          <a:solidFill>
+                            <a:srgbClr val="1E293B"/>
+                          </a:solidFill>
+                          <a:latin typeface="Calibri" pitchFamily="34" charset="0"/>
+                          <a:ea typeface="Calibri" pitchFamily="34" charset="-122"/>
+                          <a:cs typeface="Calibri" pitchFamily="34" charset="-120"/>
+                        </a:rPr>
+                        <a:t>Agent</a:t>
+                      </a:r>
+                      <a:endParaRPr lang="en-US" sz="900" dirty="0">
+                        <a:latin typeface="Calibri" charset="0"/>
+                        <a:ea typeface="Calibri" charset="0"/>
+                        <a:cs typeface="Calibri" charset="0"/>
+                      </a:endParaRPr>
+                    </a:p>
+                    <a:p>
+                      <a:pPr indent="0" marL="0">
+                        <a:buNone/>
+                      </a:pPr>
+                      <a:r>
+                        <a:rPr lang="en-US" sz="900" dirty="0">
+                          <a:solidFill>
+                            <a:srgbClr val="1E293B"/>
+                          </a:solidFill>
+                          <a:latin typeface="Calibri" pitchFamily="34" charset="0"/>
+                          <a:ea typeface="Calibri" pitchFamily="34" charset="-122"/>
+                          <a:cs typeface="Calibri" pitchFamily="34" charset="-120"/>
+                        </a:rPr>
+                        <a:t>Observability</a:t>
+                      </a:r>
+                      <a:endParaRPr lang="en-US" sz="900" dirty="0">
+                        <a:latin typeface="Calibri" charset="0"/>
+                        <a:ea typeface="Calibri" charset="0"/>
+                        <a:cs typeface="Calibri" charset="0"/>
+                      </a:endParaRPr>
+                    </a:p>
+                  </a:txBody>
+                  <a:tcPr marL="91440" marR="91440" marT="45720" marB="45720" anchor="ctr">
+                    <a:lnL w="6350" cap="flat" cmpd="sng" algn="ctr">
+                      <a:solidFill>
+                        <a:srgbClr val="E2E8F0"/>
+                      </a:solidFill>
+                      <a:prstDash val="solid"/>
+                      <a:round/>
+                      <a:headEnd type="none" w="med" len="med"/>
+                      <a:tailEnd type="none" w="med" len="med"/>
+                    </a:lnL>
+                    <a:lnR w="6350" cap="flat" cmpd="sng" algn="ctr">
+                      <a:solidFill>
+                        <a:srgbClr val="E2E8F0"/>
+                      </a:solidFill>
+                      <a:prstDash val="solid"/>
+                      <a:round/>
+                      <a:headEnd type="none" w="med" len="med"/>
+                      <a:tailEnd type="none" w="med" len="med"/>
+                    </a:lnR>
+                    <a:lnT w="6350" cap="flat" cmpd="sng" algn="ctr">
+                      <a:solidFill>
+                        <a:srgbClr val="E2E8F0"/>
+                      </a:solidFill>
+                      <a:prstDash val="solid"/>
+                      <a:round/>
+                      <a:headEnd type="none" w="med" len="med"/>
+                      <a:tailEnd type="none" w="med" len="med"/>
+                    </a:lnT>
+                    <a:lnB w="6350" cap="flat" cmpd="sng" algn="ctr">
+                      <a:solidFill>
+                        <a:srgbClr val="E2E8F0"/>
+                      </a:solidFill>
+                      <a:prstDash val="solid"/>
+                      <a:round/>
+                      <a:headEnd type="none" w="med" len="med"/>
+                      <a:tailEnd type="none" w="med" len="med"/>
+                    </a:lnB>
+                    <a:solidFill>
+                      <a:srgbClr val="FFFFFF"/>
+                    </a:solidFill>
+                  </a:tcPr>
+                </a:tc>
+                <a:tc>
+                  <a:txBody>
+                    <a:bodyPr/>
+                    <a:lstStyle/>
+                    <a:p>
+                      <a:pPr indent="0" marL="0">
+                        <a:buNone/>
+                      </a:pPr>
+                      <a:r>
+                        <a:rPr lang="en-US" sz="900" b="1" dirty="0">
+                          <a:solidFill>
+                            <a:srgbClr val="1E293B"/>
+                          </a:solidFill>
+                          <a:latin typeface="Calibri" pitchFamily="34" charset="0"/>
+                          <a:ea typeface="Calibri" pitchFamily="34" charset="-122"/>
+                          <a:cs typeface="Calibri" pitchFamily="34" charset="-120"/>
+                        </a:rPr>
+                        <a:t>Reports +</a:t>
+                      </a:r>
+                      <a:endParaRPr lang="en-US" sz="900" dirty="0">
+                        <a:latin typeface="Calibri" charset="0"/>
+                        <a:ea typeface="Calibri" charset="0"/>
+                        <a:cs typeface="Calibri" charset="0"/>
+                      </a:endParaRPr>
+                    </a:p>
+                    <a:p>
+                      <a:pPr indent="0" marL="0">
+                        <a:buNone/>
+                      </a:pPr>
+                      <a:r>
+                        <a:rPr lang="en-US" sz="900" b="1" dirty="0">
+                          <a:solidFill>
+                            <a:srgbClr val="1E293B"/>
+                          </a:solidFill>
+                          <a:latin typeface="Calibri" pitchFamily="34" charset="0"/>
+                          <a:ea typeface="Calibri" pitchFamily="34" charset="-122"/>
+                          <a:cs typeface="Calibri" pitchFamily="34" charset="-120"/>
+                        </a:rPr>
+                        <a:t>Transcripts</a:t>
+                      </a:r>
+                      <a:endParaRPr lang="en-US" sz="900" dirty="0">
+                        <a:latin typeface="Calibri" charset="0"/>
+                        <a:ea typeface="Calibri" charset="0"/>
+                        <a:cs typeface="Calibri" charset="0"/>
+                      </a:endParaRPr>
+                    </a:p>
+                  </a:txBody>
+                  <a:tcPr marL="91440" marR="91440" marT="45720" marB="45720" anchor="ctr">
                     <a:lnL w="6350" cap="flat" cmpd="sng" algn="ctr">
                       <a:solidFill>
                         <a:srgbClr val="E2E8F0"/>
@@ -9670,7 +10799,7 @@
                         <a:buNone/>
                       </a:pPr>
                       <a:r>
-                        <a:rPr lang="en-US" sz="1200" dirty="0">
+                        <a:rPr lang="en-US" sz="900" dirty="0">
                           <a:solidFill>
                             <a:srgbClr val="1E293B"/>
                           </a:solidFill>
@@ -9678,16 +10807,16 @@
                           <a:ea typeface="Calibri" pitchFamily="34" charset="-122"/>
                           <a:cs typeface="Calibri" pitchFamily="34" charset="-120"/>
                         </a:rPr>
-                        <a:t>N/A</a:t>
+                        <a:t>✓ Strong</a:t>
                       </a:r>
-                      <a:endParaRPr lang="en-US" sz="1200" dirty="0">
+                      <a:endParaRPr lang="en-US" sz="900" dirty="0">
                         <a:latin typeface="Calibri" charset="0"/>
                         <a:ea typeface="Calibri" charset="0"/>
                         <a:cs typeface="Calibri" charset="0"/>
                       </a:endParaRPr>
                     </a:p>
                   </a:txBody>
-                  <a:tcPr marL="91440" marR="91440" marT="45720" marB="45720">
+                  <a:tcPr marL="91440" marR="91440" marT="45720" marB="45720" anchor="ctr">
                     <a:lnL w="6350" cap="flat" cmpd="sng" algn="ctr">
                       <a:solidFill>
                         <a:srgbClr val="E2E8F0"/>
@@ -9738,7 +10867,7 @@
                         <a:buNone/>
                       </a:pPr>
                       <a:r>
-                        <a:rPr lang="en-US" sz="1200" dirty="0">
+                        <a:rPr lang="en-US" sz="900" dirty="0">
                           <a:solidFill>
                             <a:srgbClr val="1E293B"/>
                           </a:solidFill>
@@ -9746,86 +10875,16 @@
                           <a:ea typeface="Calibri" pitchFamily="34" charset="-122"/>
                           <a:cs typeface="Calibri" pitchFamily="34" charset="-120"/>
                         </a:rPr>
-                        <a:t>1-2 models</a:t>
+                        <a:t>✓ Strong</a:t>
                       </a:r>
-                      <a:endParaRPr lang="en-US" sz="1200" dirty="0">
+                      <a:endParaRPr lang="en-US" sz="900" dirty="0">
                         <a:latin typeface="Calibri" charset="0"/>
                         <a:ea typeface="Calibri" charset="0"/>
                         <a:cs typeface="Calibri" charset="0"/>
                       </a:endParaRPr>
                     </a:p>
                   </a:txBody>
-                  <a:tcPr marL="91440" marR="91440" marT="45720" marB="45720">
-                    <a:lnL w="6350" cap="flat" cmpd="sng" algn="ctr">
-                      <a:solidFill>
-                        <a:srgbClr val="E2E8F0"/>
-                      </a:solidFill>
-                      <a:prstDash val="solid"/>
-                      <a:round/>
-                      <a:headEnd type="none" w="med" len="med"/>
-                      <a:tailEnd type="none" w="med" len="med"/>
-                    </a:lnL>
-                    <a:lnR w="6350" cap="flat" cmpd="sng" algn="ctr">
-                      <a:solidFill>
-                        <a:srgbClr val="E2E8F0"/>
-                      </a:solidFill>
-                      <a:prstDash val="solid"/>
-                      <a:round/>
-                      <a:headEnd type="none" w="med" len="med"/>
-                      <a:tailEnd type="none" w="med" len="med"/>
-                    </a:lnR>
-                    <a:lnT w="6350" cap="flat" cmpd="sng" algn="ctr">
-                      <a:solidFill>
-                        <a:srgbClr val="E2E8F0"/>
-                      </a:solidFill>
-                      <a:prstDash val="solid"/>
-                      <a:round/>
-                      <a:headEnd type="none" w="med" len="med"/>
-                      <a:tailEnd type="none" w="med" len="med"/>
-                    </a:lnT>
-                    <a:lnB w="6350" cap="flat" cmpd="sng" algn="ctr">
-                      <a:solidFill>
-                        <a:srgbClr val="E2E8F0"/>
-                      </a:solidFill>
-                      <a:prstDash val="solid"/>
-                      <a:round/>
-                      <a:headEnd type="none" w="med" len="med"/>
-                      <a:tailEnd type="none" w="med" len="med"/>
-                    </a:lnB>
-                    <a:solidFill>
-                      <a:srgbClr val="FFFFFF"/>
-                    </a:solidFill>
-                  </a:tcPr>
-                </a:tc>
-              </a:tr>
-              <a:tr h="384048">
-                <a:tc>
-                  <a:txBody>
-                    <a:bodyPr/>
-                    <a:lstStyle/>
-                    <a:p>
-                      <a:pPr indent="0" marL="0">
-                        <a:buNone/>
-                      </a:pPr>
-                      <a:r>
-                        <a:rPr lang="en-US" sz="1200" dirty="0">
-                          <a:solidFill>
-                            <a:srgbClr val="1E293B"/>
-                          </a:solidFill>
-                          <a:latin typeface="Calibri" pitchFamily="34" charset="0"/>
-                          <a:ea typeface="Calibri" pitchFamily="34" charset="-122"/>
-                          <a:cs typeface="Calibri" pitchFamily="34" charset="-120"/>
-                        </a:rPr>
-                        <a:t>Compliance ready</a:t>
-                      </a:r>
-                      <a:endParaRPr lang="en-US" sz="1200" dirty="0">
-                        <a:latin typeface="Calibri" charset="0"/>
-                        <a:ea typeface="Calibri" charset="0"/>
-                        <a:cs typeface="Calibri" charset="0"/>
-                      </a:endParaRPr>
-                    </a:p>
-                  </a:txBody>
-                  <a:tcPr marL="91440" marR="91440" marT="45720" marB="45720">
+                  <a:tcPr marL="91440" marR="91440" marT="45720" marB="45720" anchor="ctr">
                     <a:lnL w="6350" cap="flat" cmpd="sng" algn="ctr">
                       <a:solidFill>
                         <a:srgbClr val="E2E8F0"/>
@@ -9876,7 +10935,7 @@
                         <a:buNone/>
                       </a:pPr>
                       <a:r>
-                        <a:rPr lang="en-US" sz="1200" b="1" dirty="0">
+                        <a:rPr lang="en-US" sz="900" dirty="0">
                           <a:solidFill>
                             <a:srgbClr val="1E293B"/>
                           </a:solidFill>
@@ -9884,16 +10943,285 @@
                           <a:ea typeface="Calibri" pitchFamily="34" charset="-122"/>
                           <a:cs typeface="Calibri" pitchFamily="34" charset="-120"/>
                         </a:rPr>
-                        <a:t>GDPR + SOC 2</a:t>
+                        <a:t>✓ Core</a:t>
                       </a:r>
-                      <a:endParaRPr lang="en-US" sz="1200" dirty="0">
+                      <a:endParaRPr lang="en-US" sz="900" dirty="0">
+                        <a:latin typeface="Calibri" charset="0"/>
+                        <a:ea typeface="Calibri" charset="0"/>
+                        <a:cs typeface="Calibri" charset="0"/>
+                      </a:endParaRPr>
+                    </a:p>
+                    <a:p>
+                      <a:pPr indent="0" marL="0">
+                        <a:buNone/>
+                      </a:pPr>
+                      <a:r>
+                        <a:rPr lang="en-US" sz="900" dirty="0">
+                          <a:solidFill>
+                            <a:srgbClr val="1E293B"/>
+                          </a:solidFill>
+                          <a:latin typeface="Calibri" pitchFamily="34" charset="0"/>
+                          <a:ea typeface="Calibri" pitchFamily="34" charset="-122"/>
+                          <a:cs typeface="Calibri" pitchFamily="34" charset="-120"/>
+                        </a:rPr>
+                        <a:t>focus</a:t>
+                      </a:r>
+                      <a:endParaRPr lang="en-US" sz="900" dirty="0">
                         <a:latin typeface="Calibri" charset="0"/>
                         <a:ea typeface="Calibri" charset="0"/>
                         <a:cs typeface="Calibri" charset="0"/>
                       </a:endParaRPr>
                     </a:p>
                   </a:txBody>
-                  <a:tcPr marL="91440" marR="91440" marT="45720" marB="45720">
+                  <a:tcPr marL="91440" marR="91440" marT="45720" marB="45720" anchor="ctr">
+                    <a:lnL w="6350" cap="flat" cmpd="sng" algn="ctr">
+                      <a:solidFill>
+                        <a:srgbClr val="E2E8F0"/>
+                      </a:solidFill>
+                      <a:prstDash val="solid"/>
+                      <a:round/>
+                      <a:headEnd type="none" w="med" len="med"/>
+                      <a:tailEnd type="none" w="med" len="med"/>
+                    </a:lnL>
+                    <a:lnR w="6350" cap="flat" cmpd="sng" algn="ctr">
+                      <a:solidFill>
+                        <a:srgbClr val="E2E8F0"/>
+                      </a:solidFill>
+                      <a:prstDash val="solid"/>
+                      <a:round/>
+                      <a:headEnd type="none" w="med" len="med"/>
+                      <a:tailEnd type="none" w="med" len="med"/>
+                    </a:lnR>
+                    <a:lnT w="6350" cap="flat" cmpd="sng" algn="ctr">
+                      <a:solidFill>
+                        <a:srgbClr val="E2E8F0"/>
+                      </a:solidFill>
+                      <a:prstDash val="solid"/>
+                      <a:round/>
+                      <a:headEnd type="none" w="med" len="med"/>
+                      <a:tailEnd type="none" w="med" len="med"/>
+                    </a:lnT>
+                    <a:lnB w="6350" cap="flat" cmpd="sng" algn="ctr">
+                      <a:solidFill>
+                        <a:srgbClr val="E2E8F0"/>
+                      </a:solidFill>
+                      <a:prstDash val="solid"/>
+                      <a:round/>
+                      <a:headEnd type="none" w="med" len="med"/>
+                      <a:tailEnd type="none" w="med" len="med"/>
+                    </a:lnB>
+                    <a:solidFill>
+                      <a:srgbClr val="FFFFFF"/>
+                    </a:solidFill>
+                  </a:tcPr>
+                </a:tc>
+                <a:tc>
+                  <a:txBody>
+                    <a:bodyPr/>
+                    <a:lstStyle/>
+                    <a:p>
+                      <a:pPr indent="0" marL="0">
+                        <a:buNone/>
+                      </a:pPr>
+                      <a:r>
+                        <a:rPr lang="en-US" sz="900" dirty="0">
+                          <a:solidFill>
+                            <a:srgbClr val="1E293B"/>
+                          </a:solidFill>
+                          <a:latin typeface="Calibri" pitchFamily="34" charset="0"/>
+                          <a:ea typeface="Calibri" pitchFamily="34" charset="-122"/>
+                          <a:cs typeface="Calibri" pitchFamily="34" charset="-120"/>
+                        </a:rPr>
+                        <a:t>✓ Core</a:t>
+                      </a:r>
+                      <a:endParaRPr lang="en-US" sz="900" dirty="0">
+                        <a:latin typeface="Calibri" charset="0"/>
+                        <a:ea typeface="Calibri" charset="0"/>
+                        <a:cs typeface="Calibri" charset="0"/>
+                      </a:endParaRPr>
+                    </a:p>
+                    <a:p>
+                      <a:pPr indent="0" marL="0">
+                        <a:buNone/>
+                      </a:pPr>
+                      <a:r>
+                        <a:rPr lang="en-US" sz="900" dirty="0">
+                          <a:solidFill>
+                            <a:srgbClr val="1E293B"/>
+                          </a:solidFill>
+                          <a:latin typeface="Calibri" pitchFamily="34" charset="0"/>
+                          <a:ea typeface="Calibri" pitchFamily="34" charset="-122"/>
+                          <a:cs typeface="Calibri" pitchFamily="34" charset="-120"/>
+                        </a:rPr>
+                        <a:t>focus</a:t>
+                      </a:r>
+                      <a:endParaRPr lang="en-US" sz="900" dirty="0">
+                        <a:latin typeface="Calibri" charset="0"/>
+                        <a:ea typeface="Calibri" charset="0"/>
+                        <a:cs typeface="Calibri" charset="0"/>
+                      </a:endParaRPr>
+                    </a:p>
+                  </a:txBody>
+                  <a:tcPr marL="91440" marR="91440" marT="45720" marB="45720" anchor="ctr">
+                    <a:lnL w="6350" cap="flat" cmpd="sng" algn="ctr">
+                      <a:solidFill>
+                        <a:srgbClr val="E2E8F0"/>
+                      </a:solidFill>
+                      <a:prstDash val="solid"/>
+                      <a:round/>
+                      <a:headEnd type="none" w="med" len="med"/>
+                      <a:tailEnd type="none" w="med" len="med"/>
+                    </a:lnL>
+                    <a:lnR w="6350" cap="flat" cmpd="sng" algn="ctr">
+                      <a:solidFill>
+                        <a:srgbClr val="E2E8F0"/>
+                      </a:solidFill>
+                      <a:prstDash val="solid"/>
+                      <a:round/>
+                      <a:headEnd type="none" w="med" len="med"/>
+                      <a:tailEnd type="none" w="med" len="med"/>
+                    </a:lnR>
+                    <a:lnT w="6350" cap="flat" cmpd="sng" algn="ctr">
+                      <a:solidFill>
+                        <a:srgbClr val="E2E8F0"/>
+                      </a:solidFill>
+                      <a:prstDash val="solid"/>
+                      <a:round/>
+                      <a:headEnd type="none" w="med" len="med"/>
+                      <a:tailEnd type="none" w="med" len="med"/>
+                    </a:lnT>
+                    <a:lnB w="6350" cap="flat" cmpd="sng" algn="ctr">
+                      <a:solidFill>
+                        <a:srgbClr val="E2E8F0"/>
+                      </a:solidFill>
+                      <a:prstDash val="solid"/>
+                      <a:round/>
+                      <a:headEnd type="none" w="med" len="med"/>
+                      <a:tailEnd type="none" w="med" len="med"/>
+                    </a:lnB>
+                    <a:solidFill>
+                      <a:srgbClr val="FFFFFF"/>
+                    </a:solidFill>
+                  </a:tcPr>
+                </a:tc>
+              </a:tr>
+              <a:tr h="411480">
+                <a:tc>
+                  <a:txBody>
+                    <a:bodyPr/>
+                    <a:lstStyle/>
+                    <a:p>
+                      <a:pPr indent="0" marL="0">
+                        <a:buNone/>
+                      </a:pPr>
+                      <a:r>
+                        <a:rPr lang="en-US" sz="900" dirty="0">
+                          <a:solidFill>
+                            <a:srgbClr val="1E293B"/>
+                          </a:solidFill>
+                          <a:latin typeface="Calibri" pitchFamily="34" charset="0"/>
+                          <a:ea typeface="Calibri" pitchFamily="34" charset="-122"/>
+                          <a:cs typeface="Calibri" pitchFamily="34" charset="-120"/>
+                        </a:rPr>
+                        <a:t>Multi-Model</a:t>
+                      </a:r>
+                      <a:endParaRPr lang="en-US" sz="900" dirty="0">
+                        <a:latin typeface="Calibri" charset="0"/>
+                        <a:ea typeface="Calibri" charset="0"/>
+                        <a:cs typeface="Calibri" charset="0"/>
+                      </a:endParaRPr>
+                    </a:p>
+                    <a:p>
+                      <a:pPr indent="0" marL="0">
+                        <a:buNone/>
+                      </a:pPr>
+                      <a:r>
+                        <a:rPr lang="en-US" sz="900" dirty="0">
+                          <a:solidFill>
+                            <a:srgbClr val="1E293B"/>
+                          </a:solidFill>
+                          <a:latin typeface="Calibri" pitchFamily="34" charset="0"/>
+                          <a:ea typeface="Calibri" pitchFamily="34" charset="-122"/>
+                          <a:cs typeface="Calibri" pitchFamily="34" charset="-120"/>
+                        </a:rPr>
+                        <a:t>Support</a:t>
+                      </a:r>
+                      <a:endParaRPr lang="en-US" sz="900" dirty="0">
+                        <a:latin typeface="Calibri" charset="0"/>
+                        <a:ea typeface="Calibri" charset="0"/>
+                        <a:cs typeface="Calibri" charset="0"/>
+                      </a:endParaRPr>
+                    </a:p>
+                  </a:txBody>
+                  <a:tcPr marL="91440" marR="91440" marT="45720" marB="45720" anchor="ctr">
+                    <a:lnL w="6350" cap="flat" cmpd="sng" algn="ctr">
+                      <a:solidFill>
+                        <a:srgbClr val="E2E8F0"/>
+                      </a:solidFill>
+                      <a:prstDash val="solid"/>
+                      <a:round/>
+                      <a:headEnd type="none" w="med" len="med"/>
+                      <a:tailEnd type="none" w="med" len="med"/>
+                    </a:lnL>
+                    <a:lnR w="6350" cap="flat" cmpd="sng" algn="ctr">
+                      <a:solidFill>
+                        <a:srgbClr val="E2E8F0"/>
+                      </a:solidFill>
+                      <a:prstDash val="solid"/>
+                      <a:round/>
+                      <a:headEnd type="none" w="med" len="med"/>
+                      <a:tailEnd type="none" w="med" len="med"/>
+                    </a:lnR>
+                    <a:lnT w="6350" cap="flat" cmpd="sng" algn="ctr">
+                      <a:solidFill>
+                        <a:srgbClr val="E2E8F0"/>
+                      </a:solidFill>
+                      <a:prstDash val="solid"/>
+                      <a:round/>
+                      <a:headEnd type="none" w="med" len="med"/>
+                      <a:tailEnd type="none" w="med" len="med"/>
+                    </a:lnT>
+                    <a:lnB w="6350" cap="flat" cmpd="sng" algn="ctr">
+                      <a:solidFill>
+                        <a:srgbClr val="E2E8F0"/>
+                      </a:solidFill>
+                      <a:prstDash val="solid"/>
+                      <a:round/>
+                      <a:headEnd type="none" w="med" len="med"/>
+                      <a:tailEnd type="none" w="med" len="med"/>
+                    </a:lnB>
+                    <a:solidFill>
+                      <a:srgbClr val="FFFFFF"/>
+                    </a:solidFill>
+                  </a:tcPr>
+                </a:tc>
+                <a:tc>
+                  <a:txBody>
+                    <a:bodyPr/>
+                    <a:lstStyle/>
+                    <a:p>
+                      <a:pPr indent="0" marL="0">
+                        <a:buNone/>
+                      </a:pPr>
+                      <a:r>
+                        <a:rPr lang="en-US" sz="900" b="1" dirty="0">
+                          <a:solidFill>
+                            <a:srgbClr val="1E293B"/>
+                          </a:solidFill>
+                          <a:latin typeface="Calibri" pitchFamily="34" charset="0"/>
+                          <a:ea typeface="Calibri" pitchFamily="34" charset="-122"/>
+                          <a:cs typeface="Calibri" pitchFamily="34" charset="-120"/>
+                        </a:rPr>
+                        <a:t>20+ models</a:t>
+                      </a:r>
+                      <a:endParaRPr lang="en-US" sz="900" dirty="0">
+                        <a:latin typeface="Calibri" charset="0"/>
+                        <a:ea typeface="Calibri" charset="0"/>
+                        <a:cs typeface="Calibri" charset="0"/>
+                      </a:endParaRPr>
+                    </a:p>
+                  </a:txBody>
+                  <a:tcPr marL="91440" marR="91440" marT="45720" marB="45720" anchor="ctr">
                     <a:lnL w="6350" cap="flat" cmpd="sng" algn="ctr">
                       <a:solidFill>
                         <a:srgbClr val="E2E8F0"/>
@@ -9944,7 +11272,7 @@
                         <a:buNone/>
                       </a:pPr>
                       <a:r>
-                        <a:rPr lang="en-US" sz="1200" dirty="0">
+                        <a:rPr lang="en-US" sz="900" dirty="0">
                           <a:solidFill>
                             <a:srgbClr val="1E293B"/>
                           </a:solidFill>
@@ -9952,16 +11280,16 @@
                           <a:ea typeface="Calibri" pitchFamily="34" charset="-122"/>
                           <a:cs typeface="Calibri" pitchFamily="34" charset="-120"/>
                         </a:rPr>
-                        <a:t>None</a:t>
+                        <a:t>Multi-model</a:t>
                       </a:r>
-                      <a:endParaRPr lang="en-US" sz="1200" dirty="0">
+                      <a:endParaRPr lang="en-US" sz="900" dirty="0">
                         <a:latin typeface="Calibri" charset="0"/>
                         <a:ea typeface="Calibri" charset="0"/>
                         <a:cs typeface="Calibri" charset="0"/>
                       </a:endParaRPr>
                     </a:p>
                   </a:txBody>
-                  <a:tcPr marL="91440" marR="91440" marT="45720" marB="45720">
+                  <a:tcPr marL="91440" marR="91440" marT="45720" marB="45720" anchor="ctr">
                     <a:lnL w="6350" cap="flat" cmpd="sng" algn="ctr">
                       <a:solidFill>
                         <a:srgbClr val="E2E8F0"/>
@@ -10012,7 +11340,7 @@
                         <a:buNone/>
                       </a:pPr>
                       <a:r>
-                        <a:rPr lang="en-US" sz="1200" dirty="0">
+                        <a:rPr lang="en-US" sz="900" dirty="0">
                           <a:solidFill>
                             <a:srgbClr val="1E293B"/>
                           </a:solidFill>
@@ -10020,86 +11348,16 @@
                           <a:ea typeface="Calibri" pitchFamily="34" charset="-122"/>
                           <a:cs typeface="Calibri" pitchFamily="34" charset="-120"/>
                         </a:rPr>
-                        <a:t>Varies</a:t>
+                        <a:t>Multi-model</a:t>
                       </a:r>
-                      <a:endParaRPr lang="en-US" sz="1200" dirty="0">
+                      <a:endParaRPr lang="en-US" sz="900" dirty="0">
                         <a:latin typeface="Calibri" charset="0"/>
                         <a:ea typeface="Calibri" charset="0"/>
                         <a:cs typeface="Calibri" charset="0"/>
                       </a:endParaRPr>
                     </a:p>
                   </a:txBody>
-                  <a:tcPr marL="91440" marR="91440" marT="45720" marB="45720">
-                    <a:lnL w="6350" cap="flat" cmpd="sng" algn="ctr">
-                      <a:solidFill>
-                        <a:srgbClr val="E2E8F0"/>
-                      </a:solidFill>
-                      <a:prstDash val="solid"/>
-                      <a:round/>
-                      <a:headEnd type="none" w="med" len="med"/>
-                      <a:tailEnd type="none" w="med" len="med"/>
-                    </a:lnL>
-                    <a:lnR w="6350" cap="flat" cmpd="sng" algn="ctr">
-                      <a:solidFill>
-                        <a:srgbClr val="E2E8F0"/>
-                      </a:solidFill>
-                      <a:prstDash val="solid"/>
-                      <a:round/>
-                      <a:headEnd type="none" w="med" len="med"/>
-                      <a:tailEnd type="none" w="med" len="med"/>
-                    </a:lnR>
-                    <a:lnT w="6350" cap="flat" cmpd="sng" algn="ctr">
-                      <a:solidFill>
-                        <a:srgbClr val="E2E8F0"/>
-                      </a:solidFill>
-                      <a:prstDash val="solid"/>
-                      <a:round/>
-                      <a:headEnd type="none" w="med" len="med"/>
-                      <a:tailEnd type="none" w="med" len="med"/>
-                    </a:lnT>
-                    <a:lnB w="6350" cap="flat" cmpd="sng" algn="ctr">
-                      <a:solidFill>
-                        <a:srgbClr val="E2E8F0"/>
-                      </a:solidFill>
-                      <a:prstDash val="solid"/>
-                      <a:round/>
-                      <a:headEnd type="none" w="med" len="med"/>
-                      <a:tailEnd type="none" w="med" len="med"/>
-                    </a:lnB>
-                    <a:solidFill>
-                      <a:srgbClr val="FFFFFF"/>
-                    </a:solidFill>
-                  </a:tcPr>
-                </a:tc>
-              </a:tr>
-              <a:tr h="384048">
-                <a:tc>
-                  <a:txBody>
-                    <a:bodyPr/>
-                    <a:lstStyle/>
-                    <a:p>
-                      <a:pPr indent="0" marL="0">
-                        <a:buNone/>
-                      </a:pPr>
-                      <a:r>
-                        <a:rPr lang="en-US" sz="1200" dirty="0">
-                          <a:solidFill>
-                            <a:srgbClr val="1E293B"/>
-                          </a:solidFill>
-                          <a:latin typeface="Calibri" pitchFamily="34" charset="0"/>
-                          <a:ea typeface="Calibri" pitchFamily="34" charset="-122"/>
-                          <a:cs typeface="Calibri" pitchFamily="34" charset="-120"/>
-                        </a:rPr>
-                        <a:t>Time to first test</a:t>
-                      </a:r>
-                      <a:endParaRPr lang="en-US" sz="1200" dirty="0">
-                        <a:latin typeface="Calibri" charset="0"/>
-                        <a:ea typeface="Calibri" charset="0"/>
-                        <a:cs typeface="Calibri" charset="0"/>
-                      </a:endParaRPr>
-                    </a:p>
-                  </a:txBody>
-                  <a:tcPr marL="91440" marR="91440" marT="45720" marB="45720">
+                  <a:tcPr marL="91440" marR="91440" marT="45720" marB="45720" anchor="ctr">
                     <a:lnL w="6350" cap="flat" cmpd="sng" algn="ctr">
                       <a:solidFill>
                         <a:srgbClr val="E2E8F0"/>
@@ -10150,7 +11408,7 @@
                         <a:buNone/>
                       </a:pPr>
                       <a:r>
-                        <a:rPr lang="en-US" sz="1200" b="1" dirty="0">
+                        <a:rPr lang="en-US" sz="900" dirty="0">
                           <a:solidFill>
                             <a:srgbClr val="1E293B"/>
                           </a:solidFill>
@@ -10158,16 +11416,285 @@
                           <a:ea typeface="Calibri" pitchFamily="34" charset="-122"/>
                           <a:cs typeface="Calibri" pitchFamily="34" charset="-120"/>
                         </a:rPr>
-                        <a:t>3 minutes</a:t>
+                        <a:t>LangChain</a:t>
                       </a:r>
-                      <a:endParaRPr lang="en-US" sz="1200" dirty="0">
+                      <a:endParaRPr lang="en-US" sz="900" dirty="0">
+                        <a:latin typeface="Calibri" charset="0"/>
+                        <a:ea typeface="Calibri" charset="0"/>
+                        <a:cs typeface="Calibri" charset="0"/>
+                      </a:endParaRPr>
+                    </a:p>
+                    <a:p>
+                      <a:pPr indent="0" marL="0">
+                        <a:buNone/>
+                      </a:pPr>
+                      <a:r>
+                        <a:rPr lang="en-US" sz="900" dirty="0">
+                          <a:solidFill>
+                            <a:srgbClr val="1E293B"/>
+                          </a:solidFill>
+                          <a:latin typeface="Calibri" pitchFamily="34" charset="0"/>
+                          <a:ea typeface="Calibri" pitchFamily="34" charset="-122"/>
+                          <a:cs typeface="Calibri" pitchFamily="34" charset="-120"/>
+                        </a:rPr>
+                        <a:t>tied</a:t>
+                      </a:r>
+                      <a:endParaRPr lang="en-US" sz="900" dirty="0">
                         <a:latin typeface="Calibri" charset="0"/>
                         <a:ea typeface="Calibri" charset="0"/>
                         <a:cs typeface="Calibri" charset="0"/>
                       </a:endParaRPr>
                     </a:p>
                   </a:txBody>
-                  <a:tcPr marL="91440" marR="91440" marT="45720" marB="45720">
+                  <a:tcPr marL="91440" marR="91440" marT="45720" marB="45720" anchor="ctr">
+                    <a:lnL w="6350" cap="flat" cmpd="sng" algn="ctr">
+                      <a:solidFill>
+                        <a:srgbClr val="E2E8F0"/>
+                      </a:solidFill>
+                      <a:prstDash val="solid"/>
+                      <a:round/>
+                      <a:headEnd type="none" w="med" len="med"/>
+                      <a:tailEnd type="none" w="med" len="med"/>
+                    </a:lnL>
+                    <a:lnR w="6350" cap="flat" cmpd="sng" algn="ctr">
+                      <a:solidFill>
+                        <a:srgbClr val="E2E8F0"/>
+                      </a:solidFill>
+                      <a:prstDash val="solid"/>
+                      <a:round/>
+                      <a:headEnd type="none" w="med" len="med"/>
+                      <a:tailEnd type="none" w="med" len="med"/>
+                    </a:lnR>
+                    <a:lnT w="6350" cap="flat" cmpd="sng" algn="ctr">
+                      <a:solidFill>
+                        <a:srgbClr val="E2E8F0"/>
+                      </a:solidFill>
+                      <a:prstDash val="solid"/>
+                      <a:round/>
+                      <a:headEnd type="none" w="med" len="med"/>
+                      <a:tailEnd type="none" w="med" len="med"/>
+                    </a:lnT>
+                    <a:lnB w="6350" cap="flat" cmpd="sng" algn="ctr">
+                      <a:solidFill>
+                        <a:srgbClr val="E2E8F0"/>
+                      </a:solidFill>
+                      <a:prstDash val="solid"/>
+                      <a:round/>
+                      <a:headEnd type="none" w="med" len="med"/>
+                      <a:tailEnd type="none" w="med" len="med"/>
+                    </a:lnB>
+                    <a:solidFill>
+                      <a:srgbClr val="FFFFFF"/>
+                    </a:solidFill>
+                  </a:tcPr>
+                </a:tc>
+                <a:tc>
+                  <a:txBody>
+                    <a:bodyPr/>
+                    <a:lstStyle/>
+                    <a:p>
+                      <a:pPr indent="0" marL="0">
+                        <a:buNone/>
+                      </a:pPr>
+                      <a:r>
+                        <a:rPr lang="en-US" sz="900" dirty="0">
+                          <a:solidFill>
+                            <a:srgbClr val="1E293B"/>
+                          </a:solidFill>
+                          <a:latin typeface="Calibri" pitchFamily="34" charset="0"/>
+                          <a:ea typeface="Calibri" pitchFamily="34" charset="-122"/>
+                          <a:cs typeface="Calibri" pitchFamily="34" charset="-120"/>
+                        </a:rPr>
+                        <a:t>Any model</a:t>
+                      </a:r>
+                      <a:endParaRPr lang="en-US" sz="900" dirty="0">
+                        <a:latin typeface="Calibri" charset="0"/>
+                        <a:ea typeface="Calibri" charset="0"/>
+                        <a:cs typeface="Calibri" charset="0"/>
+                      </a:endParaRPr>
+                    </a:p>
+                  </a:txBody>
+                  <a:tcPr marL="91440" marR="91440" marT="45720" marB="45720" anchor="ctr">
+                    <a:lnL w="6350" cap="flat" cmpd="sng" algn="ctr">
+                      <a:solidFill>
+                        <a:srgbClr val="E2E8F0"/>
+                      </a:solidFill>
+                      <a:prstDash val="solid"/>
+                      <a:round/>
+                      <a:headEnd type="none" w="med" len="med"/>
+                      <a:tailEnd type="none" w="med" len="med"/>
+                    </a:lnL>
+                    <a:lnR w="6350" cap="flat" cmpd="sng" algn="ctr">
+                      <a:solidFill>
+                        <a:srgbClr val="E2E8F0"/>
+                      </a:solidFill>
+                      <a:prstDash val="solid"/>
+                      <a:round/>
+                      <a:headEnd type="none" w="med" len="med"/>
+                      <a:tailEnd type="none" w="med" len="med"/>
+                    </a:lnR>
+                    <a:lnT w="6350" cap="flat" cmpd="sng" algn="ctr">
+                      <a:solidFill>
+                        <a:srgbClr val="E2E8F0"/>
+                      </a:solidFill>
+                      <a:prstDash val="solid"/>
+                      <a:round/>
+                      <a:headEnd type="none" w="med" len="med"/>
+                      <a:tailEnd type="none" w="med" len="med"/>
+                    </a:lnT>
+                    <a:lnB w="6350" cap="flat" cmpd="sng" algn="ctr">
+                      <a:solidFill>
+                        <a:srgbClr val="E2E8F0"/>
+                      </a:solidFill>
+                      <a:prstDash val="solid"/>
+                      <a:round/>
+                      <a:headEnd type="none" w="med" len="med"/>
+                      <a:tailEnd type="none" w="med" len="med"/>
+                    </a:lnB>
+                    <a:solidFill>
+                      <a:srgbClr val="FFFFFF"/>
+                    </a:solidFill>
+                  </a:tcPr>
+                </a:tc>
+              </a:tr>
+              <a:tr h="411480">
+                <a:tc>
+                  <a:txBody>
+                    <a:bodyPr/>
+                    <a:lstStyle/>
+                    <a:p>
+                      <a:pPr indent="0" marL="0">
+                        <a:buNone/>
+                      </a:pPr>
+                      <a:r>
+                        <a:rPr lang="en-US" sz="900" dirty="0">
+                          <a:solidFill>
+                            <a:srgbClr val="1E293B"/>
+                          </a:solidFill>
+                          <a:latin typeface="Calibri" pitchFamily="34" charset="0"/>
+                          <a:ea typeface="Calibri" pitchFamily="34" charset="-122"/>
+                          <a:cs typeface="Calibri" pitchFamily="34" charset="-120"/>
+                        </a:rPr>
+                        <a:t>Compliance</a:t>
+                      </a:r>
+                      <a:endParaRPr lang="en-US" sz="900" dirty="0">
+                        <a:latin typeface="Calibri" charset="0"/>
+                        <a:ea typeface="Calibri" charset="0"/>
+                        <a:cs typeface="Calibri" charset="0"/>
+                      </a:endParaRPr>
+                    </a:p>
+                    <a:p>
+                      <a:pPr indent="0" marL="0">
+                        <a:buNone/>
+                      </a:pPr>
+                      <a:r>
+                        <a:rPr lang="en-US" sz="900" dirty="0">
+                          <a:solidFill>
+                            <a:srgbClr val="1E293B"/>
+                          </a:solidFill>
+                          <a:latin typeface="Calibri" pitchFamily="34" charset="0"/>
+                          <a:ea typeface="Calibri" pitchFamily="34" charset="-122"/>
+                          <a:cs typeface="Calibri" pitchFamily="34" charset="-120"/>
+                        </a:rPr>
+                        <a:t>Evidence</a:t>
+                      </a:r>
+                      <a:endParaRPr lang="en-US" sz="900" dirty="0">
+                        <a:latin typeface="Calibri" charset="0"/>
+                        <a:ea typeface="Calibri" charset="0"/>
+                        <a:cs typeface="Calibri" charset="0"/>
+                      </a:endParaRPr>
+                    </a:p>
+                  </a:txBody>
+                  <a:tcPr marL="91440" marR="91440" marT="45720" marB="45720" anchor="ctr">
+                    <a:lnL w="6350" cap="flat" cmpd="sng" algn="ctr">
+                      <a:solidFill>
+                        <a:srgbClr val="E2E8F0"/>
+                      </a:solidFill>
+                      <a:prstDash val="solid"/>
+                      <a:round/>
+                      <a:headEnd type="none" w="med" len="med"/>
+                      <a:tailEnd type="none" w="med" len="med"/>
+                    </a:lnL>
+                    <a:lnR w="6350" cap="flat" cmpd="sng" algn="ctr">
+                      <a:solidFill>
+                        <a:srgbClr val="E2E8F0"/>
+                      </a:solidFill>
+                      <a:prstDash val="solid"/>
+                      <a:round/>
+                      <a:headEnd type="none" w="med" len="med"/>
+                      <a:tailEnd type="none" w="med" len="med"/>
+                    </a:lnR>
+                    <a:lnT w="6350" cap="flat" cmpd="sng" algn="ctr">
+                      <a:solidFill>
+                        <a:srgbClr val="E2E8F0"/>
+                      </a:solidFill>
+                      <a:prstDash val="solid"/>
+                      <a:round/>
+                      <a:headEnd type="none" w="med" len="med"/>
+                      <a:tailEnd type="none" w="med" len="med"/>
+                    </a:lnT>
+                    <a:lnB w="6350" cap="flat" cmpd="sng" algn="ctr">
+                      <a:solidFill>
+                        <a:srgbClr val="E2E8F0"/>
+                      </a:solidFill>
+                      <a:prstDash val="solid"/>
+                      <a:round/>
+                      <a:headEnd type="none" w="med" len="med"/>
+                      <a:tailEnd type="none" w="med" len="med"/>
+                    </a:lnB>
+                    <a:solidFill>
+                      <a:srgbClr val="FFFFFF"/>
+                    </a:solidFill>
+                  </a:tcPr>
+                </a:tc>
+                <a:tc>
+                  <a:txBody>
+                    <a:bodyPr/>
+                    <a:lstStyle/>
+                    <a:p>
+                      <a:pPr indent="0" marL="0">
+                        <a:buNone/>
+                      </a:pPr>
+                      <a:r>
+                        <a:rPr lang="en-US" sz="900" b="1" dirty="0">
+                          <a:solidFill>
+                            <a:srgbClr val="1E293B"/>
+                          </a:solidFill>
+                          <a:latin typeface="Calibri" pitchFamily="34" charset="0"/>
+                          <a:ea typeface="Calibri" pitchFamily="34" charset="-122"/>
+                          <a:cs typeface="Calibri" pitchFamily="34" charset="-120"/>
+                        </a:rPr>
+                        <a:t>GDPR + SOC 2</a:t>
+                      </a:r>
+                      <a:endParaRPr lang="en-US" sz="900" dirty="0">
+                        <a:latin typeface="Calibri" charset="0"/>
+                        <a:ea typeface="Calibri" charset="0"/>
+                        <a:cs typeface="Calibri" charset="0"/>
+                      </a:endParaRPr>
+                    </a:p>
+                    <a:p>
+                      <a:pPr indent="0" marL="0">
+                        <a:buNone/>
+                      </a:pPr>
+                      <a:r>
+                        <a:rPr lang="en-US" sz="900" b="1" dirty="0">
+                          <a:solidFill>
+                            <a:srgbClr val="1E293B"/>
+                          </a:solidFill>
+                          <a:latin typeface="Calibri" pitchFamily="34" charset="0"/>
+                          <a:ea typeface="Calibri" pitchFamily="34" charset="-122"/>
+                          <a:cs typeface="Calibri" pitchFamily="34" charset="-120"/>
+                        </a:rPr>
+                        <a:t>auto-reports</a:t>
+                      </a:r>
+                      <a:endParaRPr lang="en-US" sz="900" dirty="0">
+                        <a:latin typeface="Calibri" charset="0"/>
+                        <a:ea typeface="Calibri" charset="0"/>
+                        <a:cs typeface="Calibri" charset="0"/>
+                      </a:endParaRPr>
+                    </a:p>
+                  </a:txBody>
+                  <a:tcPr marL="91440" marR="91440" marT="45720" marB="45720" anchor="ctr">
                     <a:lnL w="6350" cap="flat" cmpd="sng" algn="ctr">
                       <a:solidFill>
                         <a:srgbClr val="E2E8F0"/>
@@ -10218,7 +11745,7 @@
                         <a:buNone/>
                       </a:pPr>
                       <a:r>
-                        <a:rPr lang="en-US" sz="1200" dirty="0">
+                        <a:rPr lang="en-US" sz="900" dirty="0">
                           <a:solidFill>
                             <a:srgbClr val="1E293B"/>
                           </a:solidFill>
@@ -10226,16 +11753,16 @@
                           <a:ea typeface="Calibri" pitchFamily="34" charset="-122"/>
                           <a:cs typeface="Calibri" pitchFamily="34" charset="-120"/>
                         </a:rPr>
-                        <a:t>Days/weeks</a:t>
+                        <a:t>Varies</a:t>
                       </a:r>
-                      <a:endParaRPr lang="en-US" sz="1200" dirty="0">
+                      <a:endParaRPr lang="en-US" sz="900" dirty="0">
                         <a:latin typeface="Calibri" charset="0"/>
                         <a:ea typeface="Calibri" charset="0"/>
                         <a:cs typeface="Calibri" charset="0"/>
                       </a:endParaRPr>
                     </a:p>
                   </a:txBody>
-                  <a:tcPr marL="91440" marR="91440" marT="45720" marB="45720">
+                  <a:tcPr marL="91440" marR="91440" marT="45720" marB="45720" anchor="ctr">
                     <a:lnL w="6350" cap="flat" cmpd="sng" algn="ctr">
                       <a:solidFill>
                         <a:srgbClr val="E2E8F0"/>
@@ -10286,7 +11813,7 @@
                         <a:buNone/>
                       </a:pPr>
                       <a:r>
-                        <a:rPr lang="en-US" sz="1200" dirty="0">
+                        <a:rPr lang="en-US" sz="900" dirty="0">
                           <a:solidFill>
                             <a:srgbClr val="1E293B"/>
                           </a:solidFill>
@@ -10294,86 +11821,16 @@
                           <a:ea typeface="Calibri" pitchFamily="34" charset="-122"/>
                           <a:cs typeface="Calibri" pitchFamily="34" charset="-120"/>
                         </a:rPr>
-                        <a:t>Hours</a:t>
+                        <a:t>Varies</a:t>
                       </a:r>
-                      <a:endParaRPr lang="en-US" sz="1200" dirty="0">
+                      <a:endParaRPr lang="en-US" sz="900" dirty="0">
                         <a:latin typeface="Calibri" charset="0"/>
                         <a:ea typeface="Calibri" charset="0"/>
                         <a:cs typeface="Calibri" charset="0"/>
                       </a:endParaRPr>
                     </a:p>
                   </a:txBody>
-                  <a:tcPr marL="91440" marR="91440" marT="45720" marB="45720">
-                    <a:lnL w="6350" cap="flat" cmpd="sng" algn="ctr">
-                      <a:solidFill>
-                        <a:srgbClr val="E2E8F0"/>
-                      </a:solidFill>
-                      <a:prstDash val="solid"/>
-                      <a:round/>
-                      <a:headEnd type="none" w="med" len="med"/>
-                      <a:tailEnd type="none" w="med" len="med"/>
-                    </a:lnL>
-                    <a:lnR w="6350" cap="flat" cmpd="sng" algn="ctr">
-                      <a:solidFill>
-                        <a:srgbClr val="E2E8F0"/>
-                      </a:solidFill>
-                      <a:prstDash val="solid"/>
-                      <a:round/>
-                      <a:headEnd type="none" w="med" len="med"/>
-                      <a:tailEnd type="none" w="med" len="med"/>
-                    </a:lnR>
-                    <a:lnT w="6350" cap="flat" cmpd="sng" algn="ctr">
-                      <a:solidFill>
-                        <a:srgbClr val="E2E8F0"/>
-                      </a:solidFill>
-                      <a:prstDash val="solid"/>
-                      <a:round/>
-                      <a:headEnd type="none" w="med" len="med"/>
-                      <a:tailEnd type="none" w="med" len="med"/>
-                    </a:lnT>
-                    <a:lnB w="6350" cap="flat" cmpd="sng" algn="ctr">
-                      <a:solidFill>
-                        <a:srgbClr val="E2E8F0"/>
-                      </a:solidFill>
-                      <a:prstDash val="solid"/>
-                      <a:round/>
-                      <a:headEnd type="none" w="med" len="med"/>
-                      <a:tailEnd type="none" w="med" len="med"/>
-                    </a:lnB>
-                    <a:solidFill>
-                      <a:srgbClr val="FFFFFF"/>
-                    </a:solidFill>
-                  </a:tcPr>
-                </a:tc>
-              </a:tr>
-              <a:tr h="384048">
-                <a:tc>
-                  <a:txBody>
-                    <a:bodyPr/>
-                    <a:lstStyle/>
-                    <a:p>
-                      <a:pPr indent="0" marL="0">
-                        <a:buNone/>
-                      </a:pPr>
-                      <a:r>
-                        <a:rPr lang="en-US" sz="1200" dirty="0">
-                          <a:solidFill>
-                            <a:srgbClr val="1E293B"/>
-                          </a:solidFill>
-                          <a:latin typeface="Calibri" pitchFamily="34" charset="0"/>
-                          <a:ea typeface="Calibri" pitchFamily="34" charset="-122"/>
-                          <a:cs typeface="Calibri" pitchFamily="34" charset="-120"/>
-                        </a:rPr>
-                        <a:t>Pricing</a:t>
-                      </a:r>
-                      <a:endParaRPr lang="en-US" sz="1200" dirty="0">
-                        <a:latin typeface="Calibri" charset="0"/>
-                        <a:ea typeface="Calibri" charset="0"/>
-                        <a:cs typeface="Calibri" charset="0"/>
-                      </a:endParaRPr>
-                    </a:p>
-                  </a:txBody>
-                  <a:tcPr marL="91440" marR="91440" marT="45720" marB="45720">
+                  <a:tcPr marL="91440" marR="91440" marT="45720" marB="45720" anchor="ctr">
                     <a:lnL w="6350" cap="flat" cmpd="sng" algn="ctr">
                       <a:solidFill>
                         <a:srgbClr val="E2E8F0"/>
@@ -10424,7 +11881,7 @@
                         <a:buNone/>
                       </a:pPr>
                       <a:r>
-                        <a:rPr lang="en-US" sz="1200" b="1" dirty="0">
+                        <a:rPr lang="en-US" sz="900" dirty="0">
                           <a:solidFill>
                             <a:srgbClr val="1E293B"/>
                           </a:solidFill>
@@ -10432,16 +11889,243 @@
                           <a:ea typeface="Calibri" pitchFamily="34" charset="-122"/>
                           <a:cs typeface="Calibri" pitchFamily="34" charset="-120"/>
                         </a:rPr>
-                        <a:t>From $0</a:t>
+                        <a:t>None</a:t>
                       </a:r>
-                      <a:endParaRPr lang="en-US" sz="1200" dirty="0">
+                      <a:endParaRPr lang="en-US" sz="900" dirty="0">
                         <a:latin typeface="Calibri" charset="0"/>
                         <a:ea typeface="Calibri" charset="0"/>
                         <a:cs typeface="Calibri" charset="0"/>
                       </a:endParaRPr>
                     </a:p>
                   </a:txBody>
-                  <a:tcPr marL="91440" marR="91440" marT="45720" marB="45720">
+                  <a:tcPr marL="91440" marR="91440" marT="45720" marB="45720" anchor="ctr">
+                    <a:lnL w="6350" cap="flat" cmpd="sng" algn="ctr">
+                      <a:solidFill>
+                        <a:srgbClr val="E2E8F0"/>
+                      </a:solidFill>
+                      <a:prstDash val="solid"/>
+                      <a:round/>
+                      <a:headEnd type="none" w="med" len="med"/>
+                      <a:tailEnd type="none" w="med" len="med"/>
+                    </a:lnL>
+                    <a:lnR w="6350" cap="flat" cmpd="sng" algn="ctr">
+                      <a:solidFill>
+                        <a:srgbClr val="E2E8F0"/>
+                      </a:solidFill>
+                      <a:prstDash val="solid"/>
+                      <a:round/>
+                      <a:headEnd type="none" w="med" len="med"/>
+                      <a:tailEnd type="none" w="med" len="med"/>
+                    </a:lnR>
+                    <a:lnT w="6350" cap="flat" cmpd="sng" algn="ctr">
+                      <a:solidFill>
+                        <a:srgbClr val="E2E8F0"/>
+                      </a:solidFill>
+                      <a:prstDash val="solid"/>
+                      <a:round/>
+                      <a:headEnd type="none" w="med" len="med"/>
+                      <a:tailEnd type="none" w="med" len="med"/>
+                    </a:lnT>
+                    <a:lnB w="6350" cap="flat" cmpd="sng" algn="ctr">
+                      <a:solidFill>
+                        <a:srgbClr val="E2E8F0"/>
+                      </a:solidFill>
+                      <a:prstDash val="solid"/>
+                      <a:round/>
+                      <a:headEnd type="none" w="med" len="med"/>
+                      <a:tailEnd type="none" w="med" len="med"/>
+                    </a:lnB>
+                    <a:solidFill>
+                      <a:srgbClr val="FFFFFF"/>
+                    </a:solidFill>
+                  </a:tcPr>
+                </a:tc>
+                <a:tc>
+                  <a:txBody>
+                    <a:bodyPr/>
+                    <a:lstStyle/>
+                    <a:p>
+                      <a:pPr indent="0" marL="0">
+                        <a:buNone/>
+                      </a:pPr>
+                      <a:r>
+                        <a:rPr lang="en-US" sz="900" dirty="0">
+                          <a:solidFill>
+                            <a:srgbClr val="1E293B"/>
+                          </a:solidFill>
+                          <a:latin typeface="Calibri" pitchFamily="34" charset="0"/>
+                          <a:ea typeface="Calibri" pitchFamily="34" charset="-122"/>
+                          <a:cs typeface="Calibri" pitchFamily="34" charset="-120"/>
+                        </a:rPr>
+                        <a:t>SOC 2</a:t>
+                      </a:r>
+                      <a:endParaRPr lang="en-US" sz="900" dirty="0">
+                        <a:latin typeface="Calibri" charset="0"/>
+                        <a:ea typeface="Calibri" charset="0"/>
+                        <a:cs typeface="Calibri" charset="0"/>
+                      </a:endParaRPr>
+                    </a:p>
+                  </a:txBody>
+                  <a:tcPr marL="91440" marR="91440" marT="45720" marB="45720" anchor="ctr">
+                    <a:lnL w="6350" cap="flat" cmpd="sng" algn="ctr">
+                      <a:solidFill>
+                        <a:srgbClr val="E2E8F0"/>
+                      </a:solidFill>
+                      <a:prstDash val="solid"/>
+                      <a:round/>
+                      <a:headEnd type="none" w="med" len="med"/>
+                      <a:tailEnd type="none" w="med" len="med"/>
+                    </a:lnL>
+                    <a:lnR w="6350" cap="flat" cmpd="sng" algn="ctr">
+                      <a:solidFill>
+                        <a:srgbClr val="E2E8F0"/>
+                      </a:solidFill>
+                      <a:prstDash val="solid"/>
+                      <a:round/>
+                      <a:headEnd type="none" w="med" len="med"/>
+                      <a:tailEnd type="none" w="med" len="med"/>
+                    </a:lnR>
+                    <a:lnT w="6350" cap="flat" cmpd="sng" algn="ctr">
+                      <a:solidFill>
+                        <a:srgbClr val="E2E8F0"/>
+                      </a:solidFill>
+                      <a:prstDash val="solid"/>
+                      <a:round/>
+                      <a:headEnd type="none" w="med" len="med"/>
+                      <a:tailEnd type="none" w="med" len="med"/>
+                    </a:lnT>
+                    <a:lnB w="6350" cap="flat" cmpd="sng" algn="ctr">
+                      <a:solidFill>
+                        <a:srgbClr val="E2E8F0"/>
+                      </a:solidFill>
+                      <a:prstDash val="solid"/>
+                      <a:round/>
+                      <a:headEnd type="none" w="med" len="med"/>
+                      <a:tailEnd type="none" w="med" len="med"/>
+                    </a:lnB>
+                    <a:solidFill>
+                      <a:srgbClr val="FFFFFF"/>
+                    </a:solidFill>
+                  </a:tcPr>
+                </a:tc>
+              </a:tr>
+              <a:tr h="411480">
+                <a:tc>
+                  <a:txBody>
+                    <a:bodyPr/>
+                    <a:lstStyle/>
+                    <a:p>
+                      <a:pPr indent="0" marL="0">
+                        <a:buNone/>
+                      </a:pPr>
+                      <a:r>
+                        <a:rPr lang="en-US" sz="900" dirty="0">
+                          <a:solidFill>
+                            <a:srgbClr val="1E293B"/>
+                          </a:solidFill>
+                          <a:latin typeface="Calibri" pitchFamily="34" charset="0"/>
+                          <a:ea typeface="Calibri" pitchFamily="34" charset="-122"/>
+                          <a:cs typeface="Calibri" pitchFamily="34" charset="-120"/>
+                        </a:rPr>
+                        <a:t>Time to</a:t>
+                      </a:r>
+                      <a:endParaRPr lang="en-US" sz="900" dirty="0">
+                        <a:latin typeface="Calibri" charset="0"/>
+                        <a:ea typeface="Calibri" charset="0"/>
+                        <a:cs typeface="Calibri" charset="0"/>
+                      </a:endParaRPr>
+                    </a:p>
+                    <a:p>
+                      <a:pPr indent="0" marL="0">
+                        <a:buNone/>
+                      </a:pPr>
+                      <a:r>
+                        <a:rPr lang="en-US" sz="900" dirty="0">
+                          <a:solidFill>
+                            <a:srgbClr val="1E293B"/>
+                          </a:solidFill>
+                          <a:latin typeface="Calibri" pitchFamily="34" charset="0"/>
+                          <a:ea typeface="Calibri" pitchFamily="34" charset="-122"/>
+                          <a:cs typeface="Calibri" pitchFamily="34" charset="-120"/>
+                        </a:rPr>
+                        <a:t>First Test</a:t>
+                      </a:r>
+                      <a:endParaRPr lang="en-US" sz="900" dirty="0">
+                        <a:latin typeface="Calibri" charset="0"/>
+                        <a:ea typeface="Calibri" charset="0"/>
+                        <a:cs typeface="Calibri" charset="0"/>
+                      </a:endParaRPr>
+                    </a:p>
+                  </a:txBody>
+                  <a:tcPr marL="91440" marR="91440" marT="45720" marB="45720" anchor="ctr">
+                    <a:lnL w="6350" cap="flat" cmpd="sng" algn="ctr">
+                      <a:solidFill>
+                        <a:srgbClr val="E2E8F0"/>
+                      </a:solidFill>
+                      <a:prstDash val="solid"/>
+                      <a:round/>
+                      <a:headEnd type="none" w="med" len="med"/>
+                      <a:tailEnd type="none" w="med" len="med"/>
+                    </a:lnL>
+                    <a:lnR w="6350" cap="flat" cmpd="sng" algn="ctr">
+                      <a:solidFill>
+                        <a:srgbClr val="E2E8F0"/>
+                      </a:solidFill>
+                      <a:prstDash val="solid"/>
+                      <a:round/>
+                      <a:headEnd type="none" w="med" len="med"/>
+                      <a:tailEnd type="none" w="med" len="med"/>
+                    </a:lnR>
+                    <a:lnT w="6350" cap="flat" cmpd="sng" algn="ctr">
+                      <a:solidFill>
+                        <a:srgbClr val="E2E8F0"/>
+                      </a:solidFill>
+                      <a:prstDash val="solid"/>
+                      <a:round/>
+                      <a:headEnd type="none" w="med" len="med"/>
+                      <a:tailEnd type="none" w="med" len="med"/>
+                    </a:lnT>
+                    <a:lnB w="6350" cap="flat" cmpd="sng" algn="ctr">
+                      <a:solidFill>
+                        <a:srgbClr val="E2E8F0"/>
+                      </a:solidFill>
+                      <a:prstDash val="solid"/>
+                      <a:round/>
+                      <a:headEnd type="none" w="med" len="med"/>
+                      <a:tailEnd type="none" w="med" len="med"/>
+                    </a:lnB>
+                    <a:solidFill>
+                      <a:srgbClr val="FFFFFF"/>
+                    </a:solidFill>
+                  </a:tcPr>
+                </a:tc>
+                <a:tc>
+                  <a:txBody>
+                    <a:bodyPr/>
+                    <a:lstStyle/>
+                    <a:p>
+                      <a:pPr indent="0" marL="0">
+                        <a:buNone/>
+                      </a:pPr>
+                      <a:r>
+                        <a:rPr lang="en-US" sz="900" b="1" dirty="0">
+                          <a:solidFill>
+                            <a:srgbClr val="1E293B"/>
+                          </a:solidFill>
+                          <a:latin typeface="Calibri" pitchFamily="34" charset="0"/>
+                          <a:ea typeface="Calibri" pitchFamily="34" charset="-122"/>
+                          <a:cs typeface="Calibri" pitchFamily="34" charset="-120"/>
+                        </a:rPr>
+                        <a:t>3 minutes</a:t>
+                      </a:r>
+                      <a:endParaRPr lang="en-US" sz="900" dirty="0">
+                        <a:latin typeface="Calibri" charset="0"/>
+                        <a:ea typeface="Calibri" charset="0"/>
+                        <a:cs typeface="Calibri" charset="0"/>
+                      </a:endParaRPr>
+                    </a:p>
+                  </a:txBody>
+                  <a:tcPr marL="91440" marR="91440" marT="45720" marB="45720" anchor="ctr">
                     <a:lnL w="6350" cap="flat" cmpd="sng" algn="ctr">
                       <a:solidFill>
                         <a:srgbClr val="E2E8F0"/>
@@ -10492,7 +12176,7 @@
                         <a:buNone/>
                       </a:pPr>
                       <a:r>
-                        <a:rPr lang="en-US" sz="1200" dirty="0">
+                        <a:rPr lang="en-US" sz="900" dirty="0">
                           <a:solidFill>
                             <a:srgbClr val="1E293B"/>
                           </a:solidFill>
@@ -10500,16 +12184,16 @@
                           <a:ea typeface="Calibri" pitchFamily="34" charset="-122"/>
                           <a:cs typeface="Calibri" pitchFamily="34" charset="-120"/>
                         </a:rPr>
-                        <a:t>$$$$ (staff)</a:t>
+                        <a:t>~30 min</a:t>
                       </a:r>
-                      <a:endParaRPr lang="en-US" sz="1200" dirty="0">
+                      <a:endParaRPr lang="en-US" sz="900" dirty="0">
                         <a:latin typeface="Calibri" charset="0"/>
                         <a:ea typeface="Calibri" charset="0"/>
                         <a:cs typeface="Calibri" charset="0"/>
                       </a:endParaRPr>
                     </a:p>
                   </a:txBody>
-                  <a:tcPr marL="91440" marR="91440" marT="45720" marB="45720">
+                  <a:tcPr marL="91440" marR="91440" marT="45720" marB="45720" anchor="ctr">
                     <a:lnL w="6350" cap="flat" cmpd="sng" algn="ctr">
                       <a:solidFill>
                         <a:srgbClr val="E2E8F0"/>
@@ -10560,7 +12244,7 @@
                         <a:buNone/>
                       </a:pPr>
                       <a:r>
-                        <a:rPr lang="en-US" sz="1200" dirty="0">
+                        <a:rPr lang="en-US" sz="900" dirty="0">
                           <a:solidFill>
                             <a:srgbClr val="1E293B"/>
                           </a:solidFill>
@@ -10568,16 +12252,152 @@
                           <a:ea typeface="Calibri" pitchFamily="34" charset="-122"/>
                           <a:cs typeface="Calibri" pitchFamily="34" charset="-120"/>
                         </a:rPr>
-                        <a:t>$50-500/mo</a:t>
+                        <a:t>~1 hour</a:t>
                       </a:r>
-                      <a:endParaRPr lang="en-US" sz="1200" dirty="0">
+                      <a:endParaRPr lang="en-US" sz="900" dirty="0">
                         <a:latin typeface="Calibri" charset="0"/>
                         <a:ea typeface="Calibri" charset="0"/>
                         <a:cs typeface="Calibri" charset="0"/>
                       </a:endParaRPr>
                     </a:p>
                   </a:txBody>
-                  <a:tcPr marL="91440" marR="91440" marT="45720" marB="45720">
+                  <a:tcPr marL="91440" marR="91440" marT="45720" marB="45720" anchor="ctr">
+                    <a:lnL w="6350" cap="flat" cmpd="sng" algn="ctr">
+                      <a:solidFill>
+                        <a:srgbClr val="E2E8F0"/>
+                      </a:solidFill>
+                      <a:prstDash val="solid"/>
+                      <a:round/>
+                      <a:headEnd type="none" w="med" len="med"/>
+                      <a:tailEnd type="none" w="med" len="med"/>
+                    </a:lnL>
+                    <a:lnR w="6350" cap="flat" cmpd="sng" algn="ctr">
+                      <a:solidFill>
+                        <a:srgbClr val="E2E8F0"/>
+                      </a:solidFill>
+                      <a:prstDash val="solid"/>
+                      <a:round/>
+                      <a:headEnd type="none" w="med" len="med"/>
+                      <a:tailEnd type="none" w="med" len="med"/>
+                    </a:lnR>
+                    <a:lnT w="6350" cap="flat" cmpd="sng" algn="ctr">
+                      <a:solidFill>
+                        <a:srgbClr val="E2E8F0"/>
+                      </a:solidFill>
+                      <a:prstDash val="solid"/>
+                      <a:round/>
+                      <a:headEnd type="none" w="med" len="med"/>
+                      <a:tailEnd type="none" w="med" len="med"/>
+                    </a:lnT>
+                    <a:lnB w="6350" cap="flat" cmpd="sng" algn="ctr">
+                      <a:solidFill>
+                        <a:srgbClr val="E2E8F0"/>
+                      </a:solidFill>
+                      <a:prstDash val="solid"/>
+                      <a:round/>
+                      <a:headEnd type="none" w="med" len="med"/>
+                      <a:tailEnd type="none" w="med" len="med"/>
+                    </a:lnB>
+                    <a:solidFill>
+                      <a:srgbClr val="FFFFFF"/>
+                    </a:solidFill>
+                  </a:tcPr>
+                </a:tc>
+                <a:tc>
+                  <a:txBody>
+                    <a:bodyPr/>
+                    <a:lstStyle/>
+                    <a:p>
+                      <a:pPr indent="0" marL="0">
+                        <a:buNone/>
+                      </a:pPr>
+                      <a:r>
+                        <a:rPr lang="en-US" sz="900" dirty="0">
+                          <a:solidFill>
+                            <a:srgbClr val="1E293B"/>
+                          </a:solidFill>
+                          <a:latin typeface="Calibri" pitchFamily="34" charset="0"/>
+                          <a:ea typeface="Calibri" pitchFamily="34" charset="-122"/>
+                          <a:cs typeface="Calibri" pitchFamily="34" charset="-120"/>
+                        </a:rPr>
+                        <a:t>~1 hour</a:t>
+                      </a:r>
+                      <a:endParaRPr lang="en-US" sz="900" dirty="0">
+                        <a:latin typeface="Calibri" charset="0"/>
+                        <a:ea typeface="Calibri" charset="0"/>
+                        <a:cs typeface="Calibri" charset="0"/>
+                      </a:endParaRPr>
+                    </a:p>
+                  </a:txBody>
+                  <a:tcPr marL="91440" marR="91440" marT="45720" marB="45720" anchor="ctr">
+                    <a:lnL w="6350" cap="flat" cmpd="sng" algn="ctr">
+                      <a:solidFill>
+                        <a:srgbClr val="E2E8F0"/>
+                      </a:solidFill>
+                      <a:prstDash val="solid"/>
+                      <a:round/>
+                      <a:headEnd type="none" w="med" len="med"/>
+                      <a:tailEnd type="none" w="med" len="med"/>
+                    </a:lnL>
+                    <a:lnR w="6350" cap="flat" cmpd="sng" algn="ctr">
+                      <a:solidFill>
+                        <a:srgbClr val="E2E8F0"/>
+                      </a:solidFill>
+                      <a:prstDash val="solid"/>
+                      <a:round/>
+                      <a:headEnd type="none" w="med" len="med"/>
+                      <a:tailEnd type="none" w="med" len="med"/>
+                    </a:lnR>
+                    <a:lnT w="6350" cap="flat" cmpd="sng" algn="ctr">
+                      <a:solidFill>
+                        <a:srgbClr val="E2E8F0"/>
+                      </a:solidFill>
+                      <a:prstDash val="solid"/>
+                      <a:round/>
+                      <a:headEnd type="none" w="med" len="med"/>
+                      <a:tailEnd type="none" w="med" len="med"/>
+                    </a:lnT>
+                    <a:lnB w="6350" cap="flat" cmpd="sng" algn="ctr">
+                      <a:solidFill>
+                        <a:srgbClr val="E2E8F0"/>
+                      </a:solidFill>
+                      <a:prstDash val="solid"/>
+                      <a:round/>
+                      <a:headEnd type="none" w="med" len="med"/>
+                      <a:tailEnd type="none" w="med" len="med"/>
+                    </a:lnB>
+                    <a:solidFill>
+                      <a:srgbClr val="FFFFFF"/>
+                    </a:solidFill>
+                  </a:tcPr>
+                </a:tc>
+                <a:tc>
+                  <a:txBody>
+                    <a:bodyPr/>
+                    <a:lstStyle/>
+                    <a:p>
+                      <a:pPr indent="0" marL="0">
+                        <a:buNone/>
+                      </a:pPr>
+                      <a:r>
+                        <a:rPr lang="en-US" sz="900" dirty="0">
+                          <a:solidFill>
+                            <a:srgbClr val="1E293B"/>
+                          </a:solidFill>
+                          <a:latin typeface="Calibri" pitchFamily="34" charset="0"/>
+                          <a:ea typeface="Calibri" pitchFamily="34" charset="-122"/>
+                          <a:cs typeface="Calibri" pitchFamily="34" charset="-120"/>
+                        </a:rPr>
+                        <a:t>SDK setup</a:t>
+                      </a:r>
+                      <a:endParaRPr lang="en-US" sz="900" dirty="0">
+                        <a:latin typeface="Calibri" charset="0"/>
+                        <a:ea typeface="Calibri" charset="0"/>
+                        <a:cs typeface="Calibri" charset="0"/>
+                      </a:endParaRPr>
+                    </a:p>
+                  </a:txBody>
+                  <a:tcPr marL="91440" marR="91440" marT="45720" marB="45720" anchor="ctr">
                     <a:lnL w="6350" cap="flat" cmpd="sng" algn="ctr">
                       <a:solidFill>
                         <a:srgbClr val="E2E8F0"/>
@@ -10624,6 +12444,79 @@
           </a:graphicData>
         </a:graphic>
       </p:graphicFrame>
+      <p:sp>
+        <p:nvSpPr>
+          <p:cNvPr id="5" name="Shape 2"/>
+          <p:cNvSpPr/>
+          <p:nvPr/>
+        </p:nvSpPr>
+        <p:spPr>
+          <a:xfrm>
+            <a:off x="640080" y="4617720"/>
+            <a:ext cx="7863840" cy="36576"/>
+          </a:xfrm>
+          <a:prstGeom prst="rect">
+            <a:avLst/>
+          </a:prstGeom>
+          <a:solidFill>
+            <a:srgbClr val="028090"/>
+          </a:solidFill>
+          <a:ln/>
+        </p:spPr>
+      </p:sp>
+      <p:sp>
+        <p:nvSpPr>
+          <p:cNvPr id="6" name="Text 3"/>
+          <p:cNvSpPr/>
+          <p:nvPr/>
+        </p:nvSpPr>
+        <p:spPr>
+          <a:xfrm>
+            <a:off x="640080" y="4709160"/>
+            <a:ext cx="7863840" cy="320040"/>
+          </a:xfrm>
+          <a:prstGeom prst="rect">
+            <a:avLst/>
+          </a:prstGeom>
+          <a:noFill/>
+          <a:ln/>
+        </p:spPr>
+        <p:txBody>
+          <a:bodyPr wrap="square" lIns="0" tIns="0" rIns="0" bIns="0" rtlCol="0" anchor="ctr"/>
+          <a:lstStyle/>
+          <a:p>
+            <a:pPr indent="0" marL="0">
+              <a:buNone/>
+            </a:pPr>
+            <a:r>
+              <a:rPr lang="en-US" sz="1200" b="1" dirty="0">
+                <a:solidFill>
+                  <a:srgbClr val="028090"/>
+                </a:solidFill>
+                <a:latin typeface="Calibri" pitchFamily="34" charset="0"/>
+                <a:ea typeface="Calibri" pitchFamily="34" charset="-122"/>
+                <a:cs typeface="Calibri" pitchFamily="34" charset="-120"/>
+              </a:rPr>
+              <a:t>ARIA's edge: </a:t>
+            </a:r>
+            <a:pPr indent="0" marL="0">
+              <a:buNone/>
+            </a:pPr>
+            <a:r>
+              <a:rPr lang="en-US" sz="1200" dirty="0">
+                <a:solidFill>
+                  <a:srgbClr val="1E293B"/>
+                </a:solidFill>
+                <a:latin typeface="Calibri" pitchFamily="34" charset="0"/>
+                <a:ea typeface="Calibri" pitchFamily="34" charset="-122"/>
+                <a:cs typeface="Calibri" pitchFamily="34" charset="-120"/>
+              </a:rPr>
+              <a:t>Offense over defense. Others watch what happened — ARIA tests what could go wrong before you ship.</a:t>
+            </a:r>
+            <a:endParaRPr lang="en-US" sz="1200" dirty="0"/>
+          </a:p>
+        </p:txBody>
+      </p:sp>
     </p:spTree>
   </p:cSld>
   <p:clrMapOvr>

--- a/docs/funding/ARIA-Evaluator-Seed-Pitch-Deck.pptx
+++ b/docs/funding/ARIA-Evaluator-Seed-Pitch-Deck.pptx
@@ -6285,7 +6285,7 @@
                 <a:ea typeface="Calibri" pitchFamily="34" charset="-122"/>
                 <a:cs typeface="Calibri" pitchFamily="34" charset="-120"/>
               </a:rPr>
-              <a:t>Real-time evaluation metrics, quality badges, plan usage tracking</a:t>
+              <a:t>Quality scores, cost tracking, score trends, dimension analytics</a:t>
             </a:r>
             <a:endParaRPr lang="en-US" sz="1100" dirty="0"/>
           </a:p>
@@ -6666,7 +6666,7 @@
                 <a:ea typeface="Calibri" pitchFamily="34" charset="-122"/>
                 <a:cs typeface="Calibri" pitchFamily="34" charset="-120"/>
               </a:rPr>
-              <a:t>Multi-Region</a:t>
+              <a:t>Observability</a:t>
             </a:r>
             <a:endParaRPr lang="en-US" sz="1500" dirty="0"/>
           </a:p>
@@ -6705,7 +6705,7 @@
                 <a:ea typeface="Calibri" pitchFamily="34" charset="-122"/>
                 <a:cs typeface="Calibri" pitchFamily="34" charset="-120"/>
               </a:rPr>
-              <a:t>8 AWS regions — deploy evaluations close to your users</a:t>
+              <a:t>Judge cost estimation, 30-day quality trends, per-dimension analytics</a:t>
             </a:r>
             <a:endParaRPr lang="en-US" sz="1100" dirty="0"/>
           </a:p>
@@ -10718,7 +10718,7 @@
                           <a:ea typeface="Calibri" pitchFamily="34" charset="-122"/>
                           <a:cs typeface="Calibri" pitchFamily="34" charset="-120"/>
                         </a:rPr>
-                        <a:t>Reports +</a:t>
+                        <a:t>Cost · Trends</a:t>
                       </a:r>
                       <a:endParaRPr lang="en-US" sz="900" dirty="0">
                         <a:latin typeface="Calibri" charset="0"/>
@@ -10739,7 +10739,7 @@
                           <a:ea typeface="Calibri" pitchFamily="34" charset="-122"/>
                           <a:cs typeface="Calibri" pitchFamily="34" charset="-120"/>
                         </a:rPr>
-                        <a:t>Transcripts</a:t>
+                        <a:t>· Dimensions</a:t>
                       </a:r>
                       <a:endParaRPr lang="en-US" sz="900" dirty="0">
                         <a:latin typeface="Calibri" charset="0"/>
